--- a/docs/milestone-5/Milestone-5-Slides.pptx
+++ b/docs/milestone-5/Milestone-5-Slides.pptx
@@ -23,18 +23,16 @@
     <p:sldId id="268" r:id="rId17"/>
     <p:sldId id="269" r:id="rId18"/>
     <p:sldId id="270" r:id="rId19"/>
-    <p:sldId id="271" r:id="rId20"/>
-    <p:sldId id="272" r:id="rId21"/>
   </p:sldIdLst>
   <p:sldSz cy="6858000" cx="12191675"/>
   <p:notesSz cx="6858000" cy="12191675"/>
   <p:embeddedFontLst>
     <p:embeddedFont>
       <p:font typeface="Century Schoolbook"/>
-      <p:regular r:id="rId22"/>
-      <p:bold r:id="rId23"/>
-      <p:italic r:id="rId24"/>
-      <p:boldItalic r:id="rId25"/>
+      <p:regular r:id="rId20"/>
+      <p:bold r:id="rId21"/>
+      <p:italic r:id="rId22"/>
+      <p:boldItalic r:id="rId23"/>
     </p:embeddedFont>
   </p:embeddedFontLst>
   <p:defaultTextStyle>
@@ -268,7 +266,7 @@
   </p:defaultTextStyle>
   <p:extLst>
     <p:ext uri="GoogleSlidesCustomDataVersion2">
-      <go:slidesCustomData xmlns:go="http://customooxmlschemas.google.com/" r:id="rId26" roundtripDataSignature="AMtx7mjEFVFhaQeD4cryYCd6+1oOZfYL3g=="/>
+      <go:slidesCustomData xmlns:go="http://customooxmlschemas.google.com/" r:id="rId24" roundtripDataSignature="AMtx7mjOQGrc2eSs87OIfppYsyFb1Ryy5w=="/>
     </p:ext>
   </p:extLst>
 </p:presentation>
@@ -2492,320 +2490,6 @@
       <p:sp>
         <p:nvSpPr>
           <p:cNvPr id="588" name="Google Shape;588;p15:notes"/>
-          <p:cNvSpPr txBox="1"/>
-          <p:nvPr>
-            <p:ph idx="12" type="sldNum"/>
-          </p:nvPr>
-        </p:nvSpPr>
-        <p:spPr>
-          <a:xfrm>
-            <a:off x="3884613" y="8685213"/>
-            <a:ext cx="2971800" cy="458787"/>
-          </a:xfrm>
-          <a:prstGeom prst="rect">
-            <a:avLst/>
-          </a:prstGeom>
-          <a:noFill/>
-          <a:ln>
-            <a:noFill/>
-          </a:ln>
-        </p:spPr>
-        <p:txBody>
-          <a:bodyPr anchorCtr="0" anchor="b" bIns="45700" lIns="91425" spcFirstLastPara="1" rIns="91425" wrap="square" tIns="45700">
-            <a:noAutofit/>
-          </a:bodyPr>
-          <a:lstStyle/>
-          <a:p>
-            <a:pPr indent="0" lvl="0" marL="0" rtl="0" algn="r">
-              <a:spcBef>
-                <a:spcPts val="0"/>
-              </a:spcBef>
-              <a:spcAft>
-                <a:spcPts val="0"/>
-              </a:spcAft>
-              <a:buNone/>
-            </a:pPr>
-            <a:fld id="{00000000-1234-1234-1234-123412341234}" type="slidenum">
-              <a:rPr lang="en-US"/>
-              <a:t>‹#›</a:t>
-            </a:fld>
-            <a:endParaRPr/>
-          </a:p>
-        </p:txBody>
-      </p:sp>
-    </p:spTree>
-  </p:cSld>
-  <p:clrMapOvr>
-    <a:masterClrMapping/>
-  </p:clrMapOvr>
-</p:notes>
-</file>
-
-<file path=ppt/notesSlides/notesSlide16.xml><?xml version="1.0" encoding="utf-8"?>
-<p:notes xmlns:a="http://schemas.openxmlformats.org/drawingml/2006/main" xmlns:r="http://schemas.openxmlformats.org/officeDocument/2006/relationships" xmlns:mc="http://schemas.openxmlformats.org/markup-compatibility/2006" xmlns:mv="urn:schemas-microsoft-com:mac:vml" xmlns:p="http://schemas.openxmlformats.org/presentationml/2006/main" xmlns:c="http://schemas.openxmlformats.org/drawingml/2006/chart" xmlns:dgm="http://schemas.openxmlformats.org/drawingml/2006/diagram" xmlns:o="urn:schemas-microsoft-com:office:office" xmlns:v="urn:schemas-microsoft-com:vml" xmlns:pvml="urn:schemas-microsoft-com:office:powerpoint" xmlns:com="http://schemas.openxmlformats.org/drawingml/2006/compatibility" xmlns:p14="http://schemas.microsoft.com/office/powerpoint/2010/main" xmlns:p15="http://schemas.microsoft.com/office/powerpoint/2012/main" xmlns:ahyp="http://schemas.microsoft.com/office/drawing/2018/hyperlinkcolor" showMasterPhAnim="0" showMasterSp="0">
-  <p:cSld>
-    <p:spTree>
-      <p:nvGrpSpPr>
-        <p:cNvPr id="629" name="Shape 629"/>
-        <p:cNvGrpSpPr/>
-        <p:nvPr/>
-      </p:nvGrpSpPr>
-      <p:grpSpPr>
-        <a:xfrm>
-          <a:off x="0" y="0"/>
-          <a:ext cx="0" cy="0"/>
-          <a:chOff x="0" y="0"/>
-          <a:chExt cx="0" cy="0"/>
-        </a:xfrm>
-      </p:grpSpPr>
-      <p:sp>
-        <p:nvSpPr>
-          <p:cNvPr id="630" name="Google Shape;630;p16:notes"/>
-          <p:cNvSpPr/>
-          <p:nvPr>
-            <p:ph idx="2" type="sldImg"/>
-          </p:nvPr>
-        </p:nvSpPr>
-        <p:spPr>
-          <a:xfrm>
-            <a:off x="685800" y="1143000"/>
-            <a:ext cx="5486400" cy="3086100"/>
-          </a:xfrm>
-          <a:custGeom>
-            <a:rect b="b" l="l" r="r" t="t"/>
-            <a:pathLst>
-              <a:path extrusionOk="0" h="120000" w="120000">
-                <a:moveTo>
-                  <a:pt x="0" y="0"/>
-                </a:moveTo>
-                <a:lnTo>
-                  <a:pt x="120000" y="0"/>
-                </a:lnTo>
-                <a:lnTo>
-                  <a:pt x="120000" y="120000"/>
-                </a:lnTo>
-                <a:lnTo>
-                  <a:pt x="0" y="120000"/>
-                </a:lnTo>
-                <a:close/>
-              </a:path>
-            </a:pathLst>
-          </a:custGeom>
-          <a:noFill/>
-          <a:ln cap="flat" cmpd="sng" w="12700">
-            <a:solidFill>
-              <a:srgbClr val="000000"/>
-            </a:solidFill>
-            <a:prstDash val="solid"/>
-            <a:round/>
-            <a:headEnd len="sm" w="sm" type="none"/>
-            <a:tailEnd len="sm" w="sm" type="none"/>
-          </a:ln>
-        </p:spPr>
-      </p:sp>
-      <p:sp>
-        <p:nvSpPr>
-          <p:cNvPr id="631" name="Google Shape;631;p16:notes"/>
-          <p:cNvSpPr txBox="1"/>
-          <p:nvPr>
-            <p:ph idx="1" type="body"/>
-          </p:nvPr>
-        </p:nvSpPr>
-        <p:spPr>
-          <a:xfrm>
-            <a:off x="685800" y="4400550"/>
-            <a:ext cx="5486400" cy="3600450"/>
-          </a:xfrm>
-          <a:prstGeom prst="rect">
-            <a:avLst/>
-          </a:prstGeom>
-          <a:noFill/>
-          <a:ln>
-            <a:noFill/>
-          </a:ln>
-        </p:spPr>
-        <p:txBody>
-          <a:bodyPr anchorCtr="0" anchor="t" bIns="45700" lIns="91425" spcFirstLastPara="1" rIns="91425" wrap="square" tIns="45700">
-            <a:noAutofit/>
-          </a:bodyPr>
-          <a:lstStyle/>
-          <a:p>
-            <a:pPr indent="0" lvl="0" marL="0" rtl="0" algn="l">
-              <a:spcBef>
-                <a:spcPts val="0"/>
-              </a:spcBef>
-              <a:spcAft>
-                <a:spcPts val="0"/>
-              </a:spcAft>
-              <a:buNone/>
-            </a:pPr>
-            <a:r>
-              <a:t/>
-            </a:r>
-            <a:endParaRPr/>
-          </a:p>
-        </p:txBody>
-      </p:sp>
-      <p:sp>
-        <p:nvSpPr>
-          <p:cNvPr id="632" name="Google Shape;632;p16:notes"/>
-          <p:cNvSpPr txBox="1"/>
-          <p:nvPr>
-            <p:ph idx="12" type="sldNum"/>
-          </p:nvPr>
-        </p:nvSpPr>
-        <p:spPr>
-          <a:xfrm>
-            <a:off x="3884613" y="8685213"/>
-            <a:ext cx="2971800" cy="458787"/>
-          </a:xfrm>
-          <a:prstGeom prst="rect">
-            <a:avLst/>
-          </a:prstGeom>
-          <a:noFill/>
-          <a:ln>
-            <a:noFill/>
-          </a:ln>
-        </p:spPr>
-        <p:txBody>
-          <a:bodyPr anchorCtr="0" anchor="b" bIns="45700" lIns="91425" spcFirstLastPara="1" rIns="91425" wrap="square" tIns="45700">
-            <a:noAutofit/>
-          </a:bodyPr>
-          <a:lstStyle/>
-          <a:p>
-            <a:pPr indent="0" lvl="0" marL="0" rtl="0" algn="r">
-              <a:spcBef>
-                <a:spcPts val="0"/>
-              </a:spcBef>
-              <a:spcAft>
-                <a:spcPts val="0"/>
-              </a:spcAft>
-              <a:buNone/>
-            </a:pPr>
-            <a:fld id="{00000000-1234-1234-1234-123412341234}" type="slidenum">
-              <a:rPr lang="en-US"/>
-              <a:t>‹#›</a:t>
-            </a:fld>
-            <a:endParaRPr/>
-          </a:p>
-        </p:txBody>
-      </p:sp>
-    </p:spTree>
-  </p:cSld>
-  <p:clrMapOvr>
-    <a:masterClrMapping/>
-  </p:clrMapOvr>
-</p:notes>
-</file>
-
-<file path=ppt/notesSlides/notesSlide17.xml><?xml version="1.0" encoding="utf-8"?>
-<p:notes xmlns:a="http://schemas.openxmlformats.org/drawingml/2006/main" xmlns:r="http://schemas.openxmlformats.org/officeDocument/2006/relationships" xmlns:mc="http://schemas.openxmlformats.org/markup-compatibility/2006" xmlns:mv="urn:schemas-microsoft-com:mac:vml" xmlns:p="http://schemas.openxmlformats.org/presentationml/2006/main" xmlns:c="http://schemas.openxmlformats.org/drawingml/2006/chart" xmlns:dgm="http://schemas.openxmlformats.org/drawingml/2006/diagram" xmlns:o="urn:schemas-microsoft-com:office:office" xmlns:v="urn:schemas-microsoft-com:vml" xmlns:pvml="urn:schemas-microsoft-com:office:powerpoint" xmlns:com="http://schemas.openxmlformats.org/drawingml/2006/compatibility" xmlns:p14="http://schemas.microsoft.com/office/powerpoint/2010/main" xmlns:p15="http://schemas.microsoft.com/office/powerpoint/2012/main" xmlns:ahyp="http://schemas.microsoft.com/office/drawing/2018/hyperlinkcolor" showMasterPhAnim="0" showMasterSp="0">
-  <p:cSld>
-    <p:spTree>
-      <p:nvGrpSpPr>
-        <p:cNvPr id="664" name="Shape 664"/>
-        <p:cNvGrpSpPr/>
-        <p:nvPr/>
-      </p:nvGrpSpPr>
-      <p:grpSpPr>
-        <a:xfrm>
-          <a:off x="0" y="0"/>
-          <a:ext cx="0" cy="0"/>
-          <a:chOff x="0" y="0"/>
-          <a:chExt cx="0" cy="0"/>
-        </a:xfrm>
-      </p:grpSpPr>
-      <p:sp>
-        <p:nvSpPr>
-          <p:cNvPr id="665" name="Google Shape;665;p17:notes"/>
-          <p:cNvSpPr/>
-          <p:nvPr>
-            <p:ph idx="2" type="sldImg"/>
-          </p:nvPr>
-        </p:nvSpPr>
-        <p:spPr>
-          <a:xfrm>
-            <a:off x="685800" y="1143000"/>
-            <a:ext cx="5486400" cy="3086100"/>
-          </a:xfrm>
-          <a:custGeom>
-            <a:rect b="b" l="l" r="r" t="t"/>
-            <a:pathLst>
-              <a:path extrusionOk="0" h="120000" w="120000">
-                <a:moveTo>
-                  <a:pt x="0" y="0"/>
-                </a:moveTo>
-                <a:lnTo>
-                  <a:pt x="120000" y="0"/>
-                </a:lnTo>
-                <a:lnTo>
-                  <a:pt x="120000" y="120000"/>
-                </a:lnTo>
-                <a:lnTo>
-                  <a:pt x="0" y="120000"/>
-                </a:lnTo>
-                <a:close/>
-              </a:path>
-            </a:pathLst>
-          </a:custGeom>
-          <a:noFill/>
-          <a:ln cap="flat" cmpd="sng" w="12700">
-            <a:solidFill>
-              <a:srgbClr val="000000"/>
-            </a:solidFill>
-            <a:prstDash val="solid"/>
-            <a:round/>
-            <a:headEnd len="sm" w="sm" type="none"/>
-            <a:tailEnd len="sm" w="sm" type="none"/>
-          </a:ln>
-        </p:spPr>
-      </p:sp>
-      <p:sp>
-        <p:nvSpPr>
-          <p:cNvPr id="666" name="Google Shape;666;p17:notes"/>
-          <p:cNvSpPr txBox="1"/>
-          <p:nvPr>
-            <p:ph idx="1" type="body"/>
-          </p:nvPr>
-        </p:nvSpPr>
-        <p:spPr>
-          <a:xfrm>
-            <a:off x="685800" y="4400550"/>
-            <a:ext cx="5486400" cy="3600450"/>
-          </a:xfrm>
-          <a:prstGeom prst="rect">
-            <a:avLst/>
-          </a:prstGeom>
-          <a:noFill/>
-          <a:ln>
-            <a:noFill/>
-          </a:ln>
-        </p:spPr>
-        <p:txBody>
-          <a:bodyPr anchorCtr="0" anchor="t" bIns="45700" lIns="91425" spcFirstLastPara="1" rIns="91425" wrap="square" tIns="45700">
-            <a:noAutofit/>
-          </a:bodyPr>
-          <a:lstStyle/>
-          <a:p>
-            <a:pPr indent="0" lvl="0" marL="0" rtl="0" algn="l">
-              <a:spcBef>
-                <a:spcPts val="0"/>
-              </a:spcBef>
-              <a:spcAft>
-                <a:spcPts val="0"/>
-              </a:spcAft>
-              <a:buNone/>
-            </a:pPr>
-            <a:r>
-              <a:t/>
-            </a:r>
-            <a:endParaRPr/>
-          </a:p>
-        </p:txBody>
-      </p:sp>
-      <p:sp>
-        <p:nvSpPr>
-          <p:cNvPr id="667" name="Google Shape;667;p17:notes"/>
           <p:cNvSpPr txBox="1"/>
           <p:nvPr>
             <p:ph idx="12" type="sldNum"/>
@@ -20118,3421 +19802,6 @@
 </p:sld>
 </file>
 
-<file path=ppt/slides/slide16.xml><?xml version="1.0" encoding="utf-8"?>
-<p:sld xmlns:a="http://schemas.openxmlformats.org/drawingml/2006/main" xmlns:r="http://schemas.openxmlformats.org/officeDocument/2006/relationships" xmlns:mc="http://schemas.openxmlformats.org/markup-compatibility/2006" xmlns:mv="urn:schemas-microsoft-com:mac:vml" xmlns:p="http://schemas.openxmlformats.org/presentationml/2006/main" xmlns:c="http://schemas.openxmlformats.org/drawingml/2006/chart" xmlns:dgm="http://schemas.openxmlformats.org/drawingml/2006/diagram" xmlns:o="urn:schemas-microsoft-com:office:office" xmlns:v="urn:schemas-microsoft-com:vml" xmlns:pvml="urn:schemas-microsoft-com:office:powerpoint" xmlns:com="http://schemas.openxmlformats.org/drawingml/2006/compatibility" xmlns:p14="http://schemas.microsoft.com/office/powerpoint/2010/main" xmlns:p15="http://schemas.microsoft.com/office/powerpoint/2012/main" xmlns:ahyp="http://schemas.microsoft.com/office/drawing/2018/hyperlinkcolor">
-  <p:cSld>
-    <p:bg>
-      <p:bgPr>
-        <a:solidFill>
-          <a:srgbClr val="0E1A2E"/>
-        </a:solidFill>
-      </p:bgPr>
-    </p:bg>
-    <p:spTree>
-      <p:nvGrpSpPr>
-        <p:cNvPr id="633" name="Shape 633"/>
-        <p:cNvGrpSpPr/>
-        <p:nvPr/>
-      </p:nvGrpSpPr>
-      <p:grpSpPr>
-        <a:xfrm>
-          <a:off x="0" y="0"/>
-          <a:ext cx="0" cy="0"/>
-          <a:chOff x="0" y="0"/>
-          <a:chExt cx="0" cy="0"/>
-        </a:xfrm>
-      </p:grpSpPr>
-      <p:sp>
-        <p:nvSpPr>
-          <p:cNvPr id="634" name="Google Shape;634;p16"/>
-          <p:cNvSpPr/>
-          <p:nvPr/>
-        </p:nvSpPr>
-        <p:spPr>
-          <a:xfrm>
-            <a:off x="566928" y="6446520"/>
-            <a:ext cx="7315200" cy="274320"/>
-          </a:xfrm>
-          <a:prstGeom prst="rect">
-            <a:avLst/>
-          </a:prstGeom>
-          <a:noFill/>
-          <a:ln>
-            <a:noFill/>
-          </a:ln>
-        </p:spPr>
-        <p:txBody>
-          <a:bodyPr anchorCtr="0" anchor="ctr" bIns="0" lIns="0" spcFirstLastPara="1" rIns="0" wrap="square" tIns="0">
-            <a:noAutofit/>
-          </a:bodyPr>
-          <a:lstStyle/>
-          <a:p>
-            <a:pPr indent="0" lvl="0" marL="0" marR="0" rtl="0" algn="l">
-              <a:spcBef>
-                <a:spcPts val="0"/>
-              </a:spcBef>
-              <a:spcAft>
-                <a:spcPts val="0"/>
-              </a:spcAft>
-              <a:buClr>
-                <a:srgbClr val="6E809E"/>
-              </a:buClr>
-              <a:buSzPts val="900"/>
-              <a:buFont typeface="Calibri"/>
-              <a:buNone/>
-            </a:pPr>
-            <a:r>
-              <a:rPr b="0" i="0" lang="en-US" sz="900" u="none" cap="none" strike="noStrike">
-                <a:solidFill>
-                  <a:srgbClr val="6E809E"/>
-                </a:solidFill>
-                <a:latin typeface="Calibri"/>
-                <a:ea typeface="Calibri"/>
-                <a:cs typeface="Calibri"/>
-                <a:sym typeface="Calibri"/>
-              </a:rPr>
-              <a:t>Driver Wellness &amp; Safety Monitoring   ·   Milestone 5</a:t>
-            </a:r>
-            <a:endParaRPr b="0" i="0" sz="900" u="none" cap="none" strike="noStrike">
-              <a:solidFill>
-                <a:schemeClr val="dk1"/>
-              </a:solidFill>
-              <a:latin typeface="Calibri"/>
-              <a:ea typeface="Calibri"/>
-              <a:cs typeface="Calibri"/>
-              <a:sym typeface="Calibri"/>
-            </a:endParaRPr>
-          </a:p>
-        </p:txBody>
-      </p:sp>
-      <p:sp>
-        <p:nvSpPr>
-          <p:cNvPr id="635" name="Google Shape;635;p16"/>
-          <p:cNvSpPr/>
-          <p:nvPr/>
-        </p:nvSpPr>
-        <p:spPr>
-          <a:xfrm>
-            <a:off x="11247120" y="6446520"/>
-            <a:ext cx="548640" cy="274320"/>
-          </a:xfrm>
-          <a:prstGeom prst="rect">
-            <a:avLst/>
-          </a:prstGeom>
-          <a:noFill/>
-          <a:ln>
-            <a:noFill/>
-          </a:ln>
-        </p:spPr>
-        <p:txBody>
-          <a:bodyPr anchorCtr="0" anchor="ctr" bIns="0" lIns="0" spcFirstLastPara="1" rIns="0" wrap="square" tIns="0">
-            <a:noAutofit/>
-          </a:bodyPr>
-          <a:lstStyle/>
-          <a:p>
-            <a:pPr indent="0" lvl="0" marL="0" marR="0" rtl="0" algn="r">
-              <a:spcBef>
-                <a:spcPts val="0"/>
-              </a:spcBef>
-              <a:spcAft>
-                <a:spcPts val="0"/>
-              </a:spcAft>
-              <a:buClr>
-                <a:srgbClr val="6E809E"/>
-              </a:buClr>
-              <a:buSzPts val="900"/>
-              <a:buFont typeface="Calibri"/>
-              <a:buNone/>
-            </a:pPr>
-            <a:r>
-              <a:rPr b="0" i="0" lang="en-US" sz="900" u="none" cap="none" strike="noStrike">
-                <a:solidFill>
-                  <a:srgbClr val="6E809E"/>
-                </a:solidFill>
-                <a:latin typeface="Calibri"/>
-                <a:ea typeface="Calibri"/>
-                <a:cs typeface="Calibri"/>
-                <a:sym typeface="Calibri"/>
-              </a:rPr>
-              <a:t>16</a:t>
-            </a:r>
-            <a:endParaRPr b="0" i="0" sz="900" u="none" cap="none" strike="noStrike">
-              <a:solidFill>
-                <a:schemeClr val="dk1"/>
-              </a:solidFill>
-              <a:latin typeface="Calibri"/>
-              <a:ea typeface="Calibri"/>
-              <a:cs typeface="Calibri"/>
-              <a:sym typeface="Calibri"/>
-            </a:endParaRPr>
-          </a:p>
-        </p:txBody>
-      </p:sp>
-      <p:sp>
-        <p:nvSpPr>
-          <p:cNvPr id="636" name="Google Shape;636;p16"/>
-          <p:cNvSpPr/>
-          <p:nvPr/>
-        </p:nvSpPr>
-        <p:spPr>
-          <a:xfrm>
-            <a:off x="566928" y="502920"/>
-            <a:ext cx="9144000" cy="274320"/>
-          </a:xfrm>
-          <a:prstGeom prst="rect">
-            <a:avLst/>
-          </a:prstGeom>
-          <a:noFill/>
-          <a:ln>
-            <a:noFill/>
-          </a:ln>
-        </p:spPr>
-        <p:txBody>
-          <a:bodyPr anchorCtr="0" anchor="ctr" bIns="0" lIns="0" spcFirstLastPara="1" rIns="0" wrap="square" tIns="0">
-            <a:noAutofit/>
-          </a:bodyPr>
-          <a:lstStyle/>
-          <a:p>
-            <a:pPr indent="0" lvl="0" marL="0" marR="0" rtl="0" algn="l">
-              <a:spcBef>
-                <a:spcPts val="0"/>
-              </a:spcBef>
-              <a:spcAft>
-                <a:spcPts val="0"/>
-              </a:spcAft>
-              <a:buClr>
-                <a:srgbClr val="2DD4BF"/>
-              </a:buClr>
-              <a:buSzPts val="1200"/>
-              <a:buFont typeface="Calibri"/>
-              <a:buNone/>
-            </a:pPr>
-            <a:r>
-              <a:rPr b="1" i="0" lang="en-US" sz="1200" u="none" cap="none" strike="noStrike">
-                <a:solidFill>
-                  <a:srgbClr val="2DD4BF"/>
-                </a:solidFill>
-                <a:latin typeface="Calibri"/>
-                <a:ea typeface="Calibri"/>
-                <a:cs typeface="Calibri"/>
-                <a:sym typeface="Calibri"/>
-              </a:rPr>
-              <a:t>CROSS-CUTTING FINDINGS</a:t>
-            </a:r>
-            <a:endParaRPr b="0" i="0" sz="1200" u="none" cap="none" strike="noStrike">
-              <a:solidFill>
-                <a:schemeClr val="dk1"/>
-              </a:solidFill>
-              <a:latin typeface="Calibri"/>
-              <a:ea typeface="Calibri"/>
-              <a:cs typeface="Calibri"/>
-              <a:sym typeface="Calibri"/>
-            </a:endParaRPr>
-          </a:p>
-        </p:txBody>
-      </p:sp>
-      <p:sp>
-        <p:nvSpPr>
-          <p:cNvPr id="637" name="Google Shape;637;p16"/>
-          <p:cNvSpPr/>
-          <p:nvPr/>
-        </p:nvSpPr>
-        <p:spPr>
-          <a:xfrm>
-            <a:off x="566928" y="868680"/>
-            <a:ext cx="11155680" cy="1280160"/>
-          </a:xfrm>
-          <a:prstGeom prst="rect">
-            <a:avLst/>
-          </a:prstGeom>
-          <a:noFill/>
-          <a:ln>
-            <a:noFill/>
-          </a:ln>
-        </p:spPr>
-        <p:txBody>
-          <a:bodyPr anchorCtr="0" anchor="ctr" bIns="0" lIns="0" spcFirstLastPara="1" rIns="0" wrap="square" tIns="0">
-            <a:noAutofit/>
-          </a:bodyPr>
-          <a:lstStyle/>
-          <a:p>
-            <a:pPr indent="0" lvl="0" marL="0" marR="0" rtl="0" algn="l">
-              <a:lnSpc>
-                <a:spcPct val="104999"/>
-              </a:lnSpc>
-              <a:spcBef>
-                <a:spcPts val="0"/>
-              </a:spcBef>
-              <a:spcAft>
-                <a:spcPts val="0"/>
-              </a:spcAft>
-              <a:buClr>
-                <a:srgbClr val="FFFFFF"/>
-              </a:buClr>
-              <a:buSzPts val="2800"/>
-              <a:buFont typeface="Century Schoolbook"/>
-              <a:buNone/>
-            </a:pPr>
-            <a:r>
-              <a:rPr b="1" i="0" lang="en-US" sz="2800" u="none" cap="none" strike="noStrike">
-                <a:solidFill>
-                  <a:srgbClr val="FFFFFF"/>
-                </a:solidFill>
-                <a:latin typeface="Century Schoolbook"/>
-                <a:ea typeface="Century Schoolbook"/>
-                <a:cs typeface="Century Schoolbook"/>
-                <a:sym typeface="Century Schoolbook"/>
-              </a:rPr>
-              <a:t>Deployment Readiness &amp; the Safe-Failure Principle</a:t>
-            </a:r>
-            <a:endParaRPr b="0" i="0" sz="2800" u="none" cap="none" strike="noStrike">
-              <a:solidFill>
-                <a:schemeClr val="dk1"/>
-              </a:solidFill>
-              <a:latin typeface="Calibri"/>
-              <a:ea typeface="Calibri"/>
-              <a:cs typeface="Calibri"/>
-              <a:sym typeface="Calibri"/>
-            </a:endParaRPr>
-          </a:p>
-        </p:txBody>
-      </p:sp>
-      <p:sp>
-        <p:nvSpPr>
-          <p:cNvPr id="638" name="Google Shape;638;p16"/>
-          <p:cNvSpPr/>
-          <p:nvPr/>
-        </p:nvSpPr>
-        <p:spPr>
-          <a:xfrm>
-            <a:off x="566928" y="1965960"/>
-            <a:ext cx="3442106" cy="1965960"/>
-          </a:xfrm>
-          <a:prstGeom prst="roundRect">
-            <a:avLst>
-              <a:gd fmla="val 4651" name="adj"/>
-            </a:avLst>
-          </a:prstGeom>
-          <a:solidFill>
-            <a:srgbClr val="16233D"/>
-          </a:solidFill>
-          <a:ln>
-            <a:noFill/>
-          </a:ln>
-          <a:effectLst>
-            <a:outerShdw blurRad="114300" rotWithShape="0" algn="bl" dir="5400000" dist="38100">
-              <a:srgbClr val="000000">
-                <a:alpha val="27843"/>
-              </a:srgbClr>
-            </a:outerShdw>
-          </a:effectLst>
-        </p:spPr>
-        <p:txBody>
-          <a:bodyPr anchorCtr="0" anchor="ctr" bIns="91425" lIns="91425" spcFirstLastPara="1" rIns="91425" wrap="square" tIns="91425">
-            <a:noAutofit/>
-          </a:bodyPr>
-          <a:lstStyle/>
-          <a:p>
-            <a:pPr indent="0" lvl="0" marL="0" rtl="0" algn="l">
-              <a:spcBef>
-                <a:spcPts val="0"/>
-              </a:spcBef>
-              <a:spcAft>
-                <a:spcPts val="0"/>
-              </a:spcAft>
-              <a:buNone/>
-            </a:pPr>
-            <a:r>
-              <a:t/>
-            </a:r>
-            <a:endParaRPr/>
-          </a:p>
-        </p:txBody>
-      </p:sp>
-      <p:sp>
-        <p:nvSpPr>
-          <p:cNvPr id="639" name="Google Shape;639;p16"/>
-          <p:cNvSpPr/>
-          <p:nvPr/>
-        </p:nvSpPr>
-        <p:spPr>
-          <a:xfrm>
-            <a:off x="841248" y="2240280"/>
-            <a:ext cx="548640" cy="548640"/>
-          </a:xfrm>
-          <a:prstGeom prst="ellipse">
-            <a:avLst/>
-          </a:prstGeom>
-          <a:solidFill>
-            <a:srgbClr val="1B2A47"/>
-          </a:solidFill>
-          <a:ln cap="flat" cmpd="sng" w="12700">
-            <a:solidFill>
-              <a:srgbClr val="2DD4BF"/>
-            </a:solidFill>
-            <a:prstDash val="solid"/>
-            <a:round/>
-            <a:headEnd len="sm" w="sm" type="none"/>
-            <a:tailEnd len="sm" w="sm" type="none"/>
-          </a:ln>
-        </p:spPr>
-        <p:txBody>
-          <a:bodyPr anchorCtr="0" anchor="ctr" bIns="91425" lIns="91425" spcFirstLastPara="1" rIns="91425" wrap="square" tIns="91425">
-            <a:noAutofit/>
-          </a:bodyPr>
-          <a:lstStyle/>
-          <a:p>
-            <a:pPr indent="0" lvl="0" marL="0" rtl="0" algn="l">
-              <a:spcBef>
-                <a:spcPts val="0"/>
-              </a:spcBef>
-              <a:spcAft>
-                <a:spcPts val="0"/>
-              </a:spcAft>
-              <a:buNone/>
-            </a:pPr>
-            <a:r>
-              <a:t/>
-            </a:r>
-            <a:endParaRPr/>
-          </a:p>
-        </p:txBody>
-      </p:sp>
-      <p:pic>
-        <p:nvPicPr>
-          <p:cNvPr descr="preencoded.png" id="640" name="Google Shape;640;p16"/>
-          <p:cNvPicPr preferRelativeResize="0"/>
-          <p:nvPr/>
-        </p:nvPicPr>
-        <p:blipFill rotWithShape="1">
-          <a:blip r:embed="rId3">
-            <a:alphaModFix/>
-          </a:blip>
-          <a:srcRect b="0" l="0" r="0" t="0"/>
-          <a:stretch/>
-        </p:blipFill>
-        <p:spPr>
-          <a:xfrm>
-            <a:off x="969264" y="2368296"/>
-            <a:ext cx="292608" cy="292608"/>
-          </a:xfrm>
-          <a:prstGeom prst="rect">
-            <a:avLst/>
-          </a:prstGeom>
-          <a:noFill/>
-          <a:ln>
-            <a:noFill/>
-          </a:ln>
-        </p:spPr>
-      </p:pic>
-      <p:sp>
-        <p:nvSpPr>
-          <p:cNvPr id="641" name="Google Shape;641;p16"/>
-          <p:cNvSpPr/>
-          <p:nvPr/>
-        </p:nvSpPr>
-        <p:spPr>
-          <a:xfrm>
-            <a:off x="841248" y="2898648"/>
-            <a:ext cx="2893466" cy="320040"/>
-          </a:xfrm>
-          <a:prstGeom prst="rect">
-            <a:avLst/>
-          </a:prstGeom>
-          <a:noFill/>
-          <a:ln>
-            <a:noFill/>
-          </a:ln>
-        </p:spPr>
-        <p:txBody>
-          <a:bodyPr anchorCtr="0" anchor="ctr" bIns="0" lIns="0" spcFirstLastPara="1" rIns="0" wrap="square" tIns="0">
-            <a:noAutofit/>
-          </a:bodyPr>
-          <a:lstStyle/>
-          <a:p>
-            <a:pPr indent="0" lvl="0" marL="0" marR="0" rtl="0" algn="l">
-              <a:spcBef>
-                <a:spcPts val="0"/>
-              </a:spcBef>
-              <a:spcAft>
-                <a:spcPts val="0"/>
-              </a:spcAft>
-              <a:buClr>
-                <a:srgbClr val="FFFFFF"/>
-              </a:buClr>
-              <a:buSzPts val="1500"/>
-              <a:buFont typeface="Calibri"/>
-              <a:buNone/>
-            </a:pPr>
-            <a:r>
-              <a:rPr b="1" i="0" lang="en-US" sz="1500" u="none" cap="none" strike="noStrike">
-                <a:solidFill>
-                  <a:srgbClr val="FFFFFF"/>
-                </a:solidFill>
-                <a:latin typeface="Calibri"/>
-                <a:ea typeface="Calibri"/>
-                <a:cs typeface="Calibri"/>
-                <a:sym typeface="Calibri"/>
-              </a:rPr>
-              <a:t>Fail the safe way</a:t>
-            </a:r>
-            <a:endParaRPr b="0" i="0" sz="1500" u="none" cap="none" strike="noStrike">
-              <a:solidFill>
-                <a:schemeClr val="dk1"/>
-              </a:solidFill>
-              <a:latin typeface="Calibri"/>
-              <a:ea typeface="Calibri"/>
-              <a:cs typeface="Calibri"/>
-              <a:sym typeface="Calibri"/>
-            </a:endParaRPr>
-          </a:p>
-        </p:txBody>
-      </p:sp>
-      <p:sp>
-        <p:nvSpPr>
-          <p:cNvPr id="642" name="Google Shape;642;p16"/>
-          <p:cNvSpPr/>
-          <p:nvPr/>
-        </p:nvSpPr>
-        <p:spPr>
-          <a:xfrm>
-            <a:off x="841248" y="3246120"/>
-            <a:ext cx="2939186" cy="640080"/>
-          </a:xfrm>
-          <a:prstGeom prst="rect">
-            <a:avLst/>
-          </a:prstGeom>
-          <a:noFill/>
-          <a:ln>
-            <a:noFill/>
-          </a:ln>
-        </p:spPr>
-        <p:txBody>
-          <a:bodyPr anchorCtr="0" anchor="ctr" bIns="0" lIns="0" spcFirstLastPara="1" rIns="0" wrap="square" tIns="0">
-            <a:noAutofit/>
-          </a:bodyPr>
-          <a:lstStyle/>
-          <a:p>
-            <a:pPr indent="0" lvl="0" marL="0" marR="0" rtl="0" algn="l">
-              <a:lnSpc>
-                <a:spcPct val="127272"/>
-              </a:lnSpc>
-              <a:spcBef>
-                <a:spcPts val="0"/>
-              </a:spcBef>
-              <a:spcAft>
-                <a:spcPts val="0"/>
-              </a:spcAft>
-              <a:buClr>
-                <a:srgbClr val="9FB2CC"/>
-              </a:buClr>
-              <a:buSzPts val="1100"/>
-              <a:buFont typeface="Calibri"/>
-              <a:buNone/>
-            </a:pPr>
-            <a:r>
-              <a:rPr b="0" i="0" lang="en-US" sz="1100" u="none" cap="none" strike="noStrike">
-                <a:solidFill>
-                  <a:srgbClr val="9FB2CC"/>
-                </a:solidFill>
-                <a:latin typeface="Calibri"/>
-                <a:ea typeface="Calibri"/>
-                <a:cs typeface="Calibri"/>
-                <a:sym typeface="Calibri"/>
-              </a:rPr>
-              <a:t>The strongest detectors (Modules 4 &amp; 5) miss or fire weakly under stress rather than asserting a confident wrong class — a recoverable failure direction for a safety alert.</a:t>
-            </a:r>
-            <a:endParaRPr b="0" i="0" sz="1100" u="none" cap="none" strike="noStrike">
-              <a:solidFill>
-                <a:schemeClr val="dk1"/>
-              </a:solidFill>
-              <a:latin typeface="Calibri"/>
-              <a:ea typeface="Calibri"/>
-              <a:cs typeface="Calibri"/>
-              <a:sym typeface="Calibri"/>
-            </a:endParaRPr>
-          </a:p>
-        </p:txBody>
-      </p:sp>
-      <p:sp>
-        <p:nvSpPr>
-          <p:cNvPr id="643" name="Google Shape;643;p16"/>
-          <p:cNvSpPr/>
-          <p:nvPr/>
-        </p:nvSpPr>
-        <p:spPr>
-          <a:xfrm>
-            <a:off x="4374794" y="1965960"/>
-            <a:ext cx="3442106" cy="1965960"/>
-          </a:xfrm>
-          <a:prstGeom prst="roundRect">
-            <a:avLst>
-              <a:gd fmla="val 4651" name="adj"/>
-            </a:avLst>
-          </a:prstGeom>
-          <a:solidFill>
-            <a:srgbClr val="16233D"/>
-          </a:solidFill>
-          <a:ln>
-            <a:noFill/>
-          </a:ln>
-          <a:effectLst>
-            <a:outerShdw blurRad="114300" rotWithShape="0" algn="bl" dir="5400000" dist="38100">
-              <a:srgbClr val="000000">
-                <a:alpha val="27843"/>
-              </a:srgbClr>
-            </a:outerShdw>
-          </a:effectLst>
-        </p:spPr>
-        <p:txBody>
-          <a:bodyPr anchorCtr="0" anchor="ctr" bIns="91425" lIns="91425" spcFirstLastPara="1" rIns="91425" wrap="square" tIns="91425">
-            <a:noAutofit/>
-          </a:bodyPr>
-          <a:lstStyle/>
-          <a:p>
-            <a:pPr indent="0" lvl="0" marL="0" rtl="0" algn="l">
-              <a:spcBef>
-                <a:spcPts val="0"/>
-              </a:spcBef>
-              <a:spcAft>
-                <a:spcPts val="0"/>
-              </a:spcAft>
-              <a:buNone/>
-            </a:pPr>
-            <a:r>
-              <a:t/>
-            </a:r>
-            <a:endParaRPr/>
-          </a:p>
-        </p:txBody>
-      </p:sp>
-      <p:sp>
-        <p:nvSpPr>
-          <p:cNvPr id="644" name="Google Shape;644;p16"/>
-          <p:cNvSpPr/>
-          <p:nvPr/>
-        </p:nvSpPr>
-        <p:spPr>
-          <a:xfrm>
-            <a:off x="4649114" y="2240280"/>
-            <a:ext cx="548640" cy="548640"/>
-          </a:xfrm>
-          <a:prstGeom prst="ellipse">
-            <a:avLst/>
-          </a:prstGeom>
-          <a:solidFill>
-            <a:srgbClr val="1B2A47"/>
-          </a:solidFill>
-          <a:ln cap="flat" cmpd="sng" w="12700">
-            <a:solidFill>
-              <a:srgbClr val="2DD4BF"/>
-            </a:solidFill>
-            <a:prstDash val="solid"/>
-            <a:round/>
-            <a:headEnd len="sm" w="sm" type="none"/>
-            <a:tailEnd len="sm" w="sm" type="none"/>
-          </a:ln>
-        </p:spPr>
-        <p:txBody>
-          <a:bodyPr anchorCtr="0" anchor="ctr" bIns="91425" lIns="91425" spcFirstLastPara="1" rIns="91425" wrap="square" tIns="91425">
-            <a:noAutofit/>
-          </a:bodyPr>
-          <a:lstStyle/>
-          <a:p>
-            <a:pPr indent="0" lvl="0" marL="0" rtl="0" algn="l">
-              <a:spcBef>
-                <a:spcPts val="0"/>
-              </a:spcBef>
-              <a:spcAft>
-                <a:spcPts val="0"/>
-              </a:spcAft>
-              <a:buNone/>
-            </a:pPr>
-            <a:r>
-              <a:t/>
-            </a:r>
-            <a:endParaRPr/>
-          </a:p>
-        </p:txBody>
-      </p:sp>
-      <p:pic>
-        <p:nvPicPr>
-          <p:cNvPr descr="preencoded.png" id="645" name="Google Shape;645;p16"/>
-          <p:cNvPicPr preferRelativeResize="0"/>
-          <p:nvPr/>
-        </p:nvPicPr>
-        <p:blipFill rotWithShape="1">
-          <a:blip r:embed="rId4">
-            <a:alphaModFix/>
-          </a:blip>
-          <a:srcRect b="0" l="0" r="0" t="0"/>
-          <a:stretch/>
-        </p:blipFill>
-        <p:spPr>
-          <a:xfrm>
-            <a:off x="4777130" y="2368296"/>
-            <a:ext cx="292608" cy="292608"/>
-          </a:xfrm>
-          <a:prstGeom prst="rect">
-            <a:avLst/>
-          </a:prstGeom>
-          <a:noFill/>
-          <a:ln>
-            <a:noFill/>
-          </a:ln>
-        </p:spPr>
-      </p:pic>
-      <p:sp>
-        <p:nvSpPr>
-          <p:cNvPr id="646" name="Google Shape;646;p16"/>
-          <p:cNvSpPr/>
-          <p:nvPr/>
-        </p:nvSpPr>
-        <p:spPr>
-          <a:xfrm>
-            <a:off x="4649114" y="2898648"/>
-            <a:ext cx="2893466" cy="320040"/>
-          </a:xfrm>
-          <a:prstGeom prst="rect">
-            <a:avLst/>
-          </a:prstGeom>
-          <a:noFill/>
-          <a:ln>
-            <a:noFill/>
-          </a:ln>
-        </p:spPr>
-        <p:txBody>
-          <a:bodyPr anchorCtr="0" anchor="ctr" bIns="0" lIns="0" spcFirstLastPara="1" rIns="0" wrap="square" tIns="0">
-            <a:noAutofit/>
-          </a:bodyPr>
-          <a:lstStyle/>
-          <a:p>
-            <a:pPr indent="0" lvl="0" marL="0" marR="0" rtl="0" algn="l">
-              <a:spcBef>
-                <a:spcPts val="0"/>
-              </a:spcBef>
-              <a:spcAft>
-                <a:spcPts val="0"/>
-              </a:spcAft>
-              <a:buClr>
-                <a:srgbClr val="FFFFFF"/>
-              </a:buClr>
-              <a:buSzPts val="1500"/>
-              <a:buFont typeface="Calibri"/>
-              <a:buNone/>
-            </a:pPr>
-            <a:r>
-              <a:rPr b="1" i="0" lang="en-US" sz="1500" u="none" cap="none" strike="noStrike">
-                <a:solidFill>
-                  <a:srgbClr val="FFFFFF"/>
-                </a:solidFill>
-                <a:latin typeface="Calibri"/>
-                <a:ea typeface="Calibri"/>
-                <a:cs typeface="Calibri"/>
-                <a:sym typeface="Calibri"/>
-              </a:rPr>
-              <a:t>One signal, not a verdict</a:t>
-            </a:r>
-            <a:endParaRPr b="0" i="0" sz="1500" u="none" cap="none" strike="noStrike">
-              <a:solidFill>
-                <a:schemeClr val="dk1"/>
-              </a:solidFill>
-              <a:latin typeface="Calibri"/>
-              <a:ea typeface="Calibri"/>
-              <a:cs typeface="Calibri"/>
-              <a:sym typeface="Calibri"/>
-            </a:endParaRPr>
-          </a:p>
-        </p:txBody>
-      </p:sp>
-      <p:sp>
-        <p:nvSpPr>
-          <p:cNvPr id="647" name="Google Shape;647;p16"/>
-          <p:cNvSpPr/>
-          <p:nvPr/>
-        </p:nvSpPr>
-        <p:spPr>
-          <a:xfrm>
-            <a:off x="4649114" y="3246120"/>
-            <a:ext cx="2939186" cy="640080"/>
-          </a:xfrm>
-          <a:prstGeom prst="rect">
-            <a:avLst/>
-          </a:prstGeom>
-          <a:noFill/>
-          <a:ln>
-            <a:noFill/>
-          </a:ln>
-        </p:spPr>
-        <p:txBody>
-          <a:bodyPr anchorCtr="0" anchor="ctr" bIns="0" lIns="0" spcFirstLastPara="1" rIns="0" wrap="square" tIns="0">
-            <a:noAutofit/>
-          </a:bodyPr>
-          <a:lstStyle/>
-          <a:p>
-            <a:pPr indent="0" lvl="0" marL="0" marR="0" rtl="0" algn="l">
-              <a:lnSpc>
-                <a:spcPct val="127272"/>
-              </a:lnSpc>
-              <a:spcBef>
-                <a:spcPts val="0"/>
-              </a:spcBef>
-              <a:spcAft>
-                <a:spcPts val="0"/>
-              </a:spcAft>
-              <a:buClr>
-                <a:srgbClr val="9FB2CC"/>
-              </a:buClr>
-              <a:buSzPts val="1100"/>
-              <a:buFont typeface="Calibri"/>
-              <a:buNone/>
-            </a:pPr>
-            <a:r>
-              <a:rPr b="0" i="0" lang="en-US" sz="1100" u="none" cap="none" strike="noStrike">
-                <a:solidFill>
-                  <a:srgbClr val="9FB2CC"/>
-                </a:solidFill>
-                <a:latin typeface="Calibri"/>
-                <a:ea typeface="Calibri"/>
-                <a:cs typeface="Calibri"/>
-                <a:sym typeface="Calibri"/>
-              </a:rPr>
-              <a:t>No module acts alone. Each feeds the weighted Risk Fusion Engine, so recall-biased operating points and even the weak fatigue module remain useful without triggering standalone alerts.</a:t>
-            </a:r>
-            <a:endParaRPr b="0" i="0" sz="1100" u="none" cap="none" strike="noStrike">
-              <a:solidFill>
-                <a:schemeClr val="dk1"/>
-              </a:solidFill>
-              <a:latin typeface="Calibri"/>
-              <a:ea typeface="Calibri"/>
-              <a:cs typeface="Calibri"/>
-              <a:sym typeface="Calibri"/>
-            </a:endParaRPr>
-          </a:p>
-        </p:txBody>
-      </p:sp>
-      <p:sp>
-        <p:nvSpPr>
-          <p:cNvPr id="648" name="Google Shape;648;p16"/>
-          <p:cNvSpPr/>
-          <p:nvPr/>
-        </p:nvSpPr>
-        <p:spPr>
-          <a:xfrm>
-            <a:off x="8182661" y="1965960"/>
-            <a:ext cx="3442106" cy="1965960"/>
-          </a:xfrm>
-          <a:prstGeom prst="roundRect">
-            <a:avLst>
-              <a:gd fmla="val 4651" name="adj"/>
-            </a:avLst>
-          </a:prstGeom>
-          <a:solidFill>
-            <a:srgbClr val="16233D"/>
-          </a:solidFill>
-          <a:ln>
-            <a:noFill/>
-          </a:ln>
-          <a:effectLst>
-            <a:outerShdw blurRad="114300" rotWithShape="0" algn="bl" dir="5400000" dist="38100">
-              <a:srgbClr val="000000">
-                <a:alpha val="27843"/>
-              </a:srgbClr>
-            </a:outerShdw>
-          </a:effectLst>
-        </p:spPr>
-        <p:txBody>
-          <a:bodyPr anchorCtr="0" anchor="ctr" bIns="91425" lIns="91425" spcFirstLastPara="1" rIns="91425" wrap="square" tIns="91425">
-            <a:noAutofit/>
-          </a:bodyPr>
-          <a:lstStyle/>
-          <a:p>
-            <a:pPr indent="0" lvl="0" marL="0" rtl="0" algn="l">
-              <a:spcBef>
-                <a:spcPts val="0"/>
-              </a:spcBef>
-              <a:spcAft>
-                <a:spcPts val="0"/>
-              </a:spcAft>
-              <a:buNone/>
-            </a:pPr>
-            <a:r>
-              <a:t/>
-            </a:r>
-            <a:endParaRPr/>
-          </a:p>
-        </p:txBody>
-      </p:sp>
-      <p:sp>
-        <p:nvSpPr>
-          <p:cNvPr id="649" name="Google Shape;649;p16"/>
-          <p:cNvSpPr/>
-          <p:nvPr/>
-        </p:nvSpPr>
-        <p:spPr>
-          <a:xfrm>
-            <a:off x="8456981" y="2240280"/>
-            <a:ext cx="548640" cy="548640"/>
-          </a:xfrm>
-          <a:prstGeom prst="ellipse">
-            <a:avLst/>
-          </a:prstGeom>
-          <a:solidFill>
-            <a:srgbClr val="1B2A47"/>
-          </a:solidFill>
-          <a:ln cap="flat" cmpd="sng" w="12700">
-            <a:solidFill>
-              <a:srgbClr val="2DD4BF"/>
-            </a:solidFill>
-            <a:prstDash val="solid"/>
-            <a:round/>
-            <a:headEnd len="sm" w="sm" type="none"/>
-            <a:tailEnd len="sm" w="sm" type="none"/>
-          </a:ln>
-        </p:spPr>
-        <p:txBody>
-          <a:bodyPr anchorCtr="0" anchor="ctr" bIns="91425" lIns="91425" spcFirstLastPara="1" rIns="91425" wrap="square" tIns="91425">
-            <a:noAutofit/>
-          </a:bodyPr>
-          <a:lstStyle/>
-          <a:p>
-            <a:pPr indent="0" lvl="0" marL="0" rtl="0" algn="l">
-              <a:spcBef>
-                <a:spcPts val="0"/>
-              </a:spcBef>
-              <a:spcAft>
-                <a:spcPts val="0"/>
-              </a:spcAft>
-              <a:buNone/>
-            </a:pPr>
-            <a:r>
-              <a:t/>
-            </a:r>
-            <a:endParaRPr/>
-          </a:p>
-        </p:txBody>
-      </p:sp>
-      <p:pic>
-        <p:nvPicPr>
-          <p:cNvPr descr="preencoded.png" id="650" name="Google Shape;650;p16"/>
-          <p:cNvPicPr preferRelativeResize="0"/>
-          <p:nvPr/>
-        </p:nvPicPr>
-        <p:blipFill rotWithShape="1">
-          <a:blip r:embed="rId5">
-            <a:alphaModFix/>
-          </a:blip>
-          <a:srcRect b="0" l="0" r="0" t="0"/>
-          <a:stretch/>
-        </p:blipFill>
-        <p:spPr>
-          <a:xfrm>
-            <a:off x="8584997" y="2368296"/>
-            <a:ext cx="292608" cy="292608"/>
-          </a:xfrm>
-          <a:prstGeom prst="rect">
-            <a:avLst/>
-          </a:prstGeom>
-          <a:noFill/>
-          <a:ln>
-            <a:noFill/>
-          </a:ln>
-        </p:spPr>
-      </p:pic>
-      <p:sp>
-        <p:nvSpPr>
-          <p:cNvPr id="651" name="Google Shape;651;p16"/>
-          <p:cNvSpPr/>
-          <p:nvPr/>
-        </p:nvSpPr>
-        <p:spPr>
-          <a:xfrm>
-            <a:off x="8456981" y="2898648"/>
-            <a:ext cx="2893466" cy="320040"/>
-          </a:xfrm>
-          <a:prstGeom prst="rect">
-            <a:avLst/>
-          </a:prstGeom>
-          <a:noFill/>
-          <a:ln>
-            <a:noFill/>
-          </a:ln>
-        </p:spPr>
-        <p:txBody>
-          <a:bodyPr anchorCtr="0" anchor="ctr" bIns="0" lIns="0" spcFirstLastPara="1" rIns="0" wrap="square" tIns="0">
-            <a:noAutofit/>
-          </a:bodyPr>
-          <a:lstStyle/>
-          <a:p>
-            <a:pPr indent="0" lvl="0" marL="0" marR="0" rtl="0" algn="l">
-              <a:spcBef>
-                <a:spcPts val="0"/>
-              </a:spcBef>
-              <a:spcAft>
-                <a:spcPts val="0"/>
-              </a:spcAft>
-              <a:buClr>
-                <a:srgbClr val="FFFFFF"/>
-              </a:buClr>
-              <a:buSzPts val="1500"/>
-              <a:buFont typeface="Calibri"/>
-              <a:buNone/>
-            </a:pPr>
-            <a:r>
-              <a:rPr b="1" i="0" lang="en-US" sz="1500" u="none" cap="none" strike="noStrike">
-                <a:solidFill>
-                  <a:srgbClr val="FFFFFF"/>
-                </a:solidFill>
-                <a:latin typeface="Calibri"/>
-                <a:ea typeface="Calibri"/>
-                <a:cs typeface="Calibri"/>
-                <a:sym typeface="Calibri"/>
-              </a:rPr>
-              <a:t>Edge-ready footprints</a:t>
-            </a:r>
-            <a:endParaRPr b="0" i="0" sz="1500" u="none" cap="none" strike="noStrike">
-              <a:solidFill>
-                <a:schemeClr val="dk1"/>
-              </a:solidFill>
-              <a:latin typeface="Calibri"/>
-              <a:ea typeface="Calibri"/>
-              <a:cs typeface="Calibri"/>
-              <a:sym typeface="Calibri"/>
-            </a:endParaRPr>
-          </a:p>
-        </p:txBody>
-      </p:sp>
-      <p:sp>
-        <p:nvSpPr>
-          <p:cNvPr id="652" name="Google Shape;652;p16"/>
-          <p:cNvSpPr/>
-          <p:nvPr/>
-        </p:nvSpPr>
-        <p:spPr>
-          <a:xfrm>
-            <a:off x="8456981" y="3246120"/>
-            <a:ext cx="2939186" cy="640080"/>
-          </a:xfrm>
-          <a:prstGeom prst="rect">
-            <a:avLst/>
-          </a:prstGeom>
-          <a:noFill/>
-          <a:ln>
-            <a:noFill/>
-          </a:ln>
-        </p:spPr>
-        <p:txBody>
-          <a:bodyPr anchorCtr="0" anchor="ctr" bIns="0" lIns="0" spcFirstLastPara="1" rIns="0" wrap="square" tIns="0">
-            <a:noAutofit/>
-          </a:bodyPr>
-          <a:lstStyle/>
-          <a:p>
-            <a:pPr indent="0" lvl="0" marL="0" marR="0" rtl="0" algn="l">
-              <a:lnSpc>
-                <a:spcPct val="127272"/>
-              </a:lnSpc>
-              <a:spcBef>
-                <a:spcPts val="0"/>
-              </a:spcBef>
-              <a:spcAft>
-                <a:spcPts val="0"/>
-              </a:spcAft>
-              <a:buClr>
-                <a:srgbClr val="9FB2CC"/>
-              </a:buClr>
-              <a:buSzPts val="1100"/>
-              <a:buFont typeface="Calibri"/>
-              <a:buNone/>
-            </a:pPr>
-            <a:r>
-              <a:rPr b="0" i="0" lang="en-US" sz="1100" u="none" cap="none" strike="noStrike">
-                <a:solidFill>
-                  <a:srgbClr val="9FB2CC"/>
-                </a:solidFill>
-                <a:latin typeface="Calibri"/>
-                <a:ea typeface="Calibri"/>
-                <a:cs typeface="Calibri"/>
-                <a:sym typeface="Calibri"/>
-              </a:rPr>
-              <a:t>Four of five models run real-time on a modest T4 — 3–7 M parameters and single-digit millisecond latency — comfortably inside edge-device budgets.</a:t>
-            </a:r>
-            <a:endParaRPr b="0" i="0" sz="1100" u="none" cap="none" strike="noStrike">
-              <a:solidFill>
-                <a:schemeClr val="dk1"/>
-              </a:solidFill>
-              <a:latin typeface="Calibri"/>
-              <a:ea typeface="Calibri"/>
-              <a:cs typeface="Calibri"/>
-              <a:sym typeface="Calibri"/>
-            </a:endParaRPr>
-          </a:p>
-        </p:txBody>
-      </p:sp>
-      <p:sp>
-        <p:nvSpPr>
-          <p:cNvPr id="653" name="Google Shape;653;p16"/>
-          <p:cNvSpPr/>
-          <p:nvPr/>
-        </p:nvSpPr>
-        <p:spPr>
-          <a:xfrm>
-            <a:off x="566928" y="4251960"/>
-            <a:ext cx="11057839" cy="1691640"/>
-          </a:xfrm>
-          <a:prstGeom prst="roundRect">
-            <a:avLst>
-              <a:gd fmla="val 5405" name="adj"/>
-            </a:avLst>
-          </a:prstGeom>
-          <a:solidFill>
-            <a:srgbClr val="0A1220"/>
-          </a:solidFill>
-          <a:ln>
-            <a:noFill/>
-          </a:ln>
-          <a:effectLst>
-            <a:outerShdw blurRad="114300" rotWithShape="0" algn="bl" dir="5400000" dist="38100">
-              <a:srgbClr val="000000">
-                <a:alpha val="27843"/>
-              </a:srgbClr>
-            </a:outerShdw>
-          </a:effectLst>
-        </p:spPr>
-        <p:txBody>
-          <a:bodyPr anchorCtr="0" anchor="ctr" bIns="91425" lIns="91425" spcFirstLastPara="1" rIns="91425" wrap="square" tIns="91425">
-            <a:noAutofit/>
-          </a:bodyPr>
-          <a:lstStyle/>
-          <a:p>
-            <a:pPr indent="0" lvl="0" marL="0" rtl="0" algn="l">
-              <a:spcBef>
-                <a:spcPts val="0"/>
-              </a:spcBef>
-              <a:spcAft>
-                <a:spcPts val="0"/>
-              </a:spcAft>
-              <a:buNone/>
-            </a:pPr>
-            <a:r>
-              <a:t/>
-            </a:r>
-            <a:endParaRPr/>
-          </a:p>
-        </p:txBody>
-      </p:sp>
-      <p:sp>
-        <p:nvSpPr>
-          <p:cNvPr id="654" name="Google Shape;654;p16"/>
-          <p:cNvSpPr/>
-          <p:nvPr/>
-        </p:nvSpPr>
-        <p:spPr>
-          <a:xfrm>
-            <a:off x="886968" y="4507992"/>
-            <a:ext cx="5486400" cy="256032"/>
-          </a:xfrm>
-          <a:prstGeom prst="rect">
-            <a:avLst/>
-          </a:prstGeom>
-          <a:noFill/>
-          <a:ln>
-            <a:noFill/>
-          </a:ln>
-        </p:spPr>
-        <p:txBody>
-          <a:bodyPr anchorCtr="0" anchor="ctr" bIns="0" lIns="0" spcFirstLastPara="1" rIns="0" wrap="square" tIns="0">
-            <a:noAutofit/>
-          </a:bodyPr>
-          <a:lstStyle/>
-          <a:p>
-            <a:pPr indent="0" lvl="0" marL="0" marR="0" rtl="0" algn="l">
-              <a:spcBef>
-                <a:spcPts val="0"/>
-              </a:spcBef>
-              <a:spcAft>
-                <a:spcPts val="0"/>
-              </a:spcAft>
-              <a:buClr>
-                <a:srgbClr val="2DD4BF"/>
-              </a:buClr>
-              <a:buSzPts val="1100"/>
-              <a:buFont typeface="Calibri"/>
-              <a:buNone/>
-            </a:pPr>
-            <a:r>
-              <a:rPr b="1" i="0" lang="en-US" sz="1100" u="none" cap="none" strike="noStrike">
-                <a:solidFill>
-                  <a:srgbClr val="2DD4BF"/>
-                </a:solidFill>
-                <a:latin typeface="Calibri"/>
-                <a:ea typeface="Calibri"/>
-                <a:cs typeface="Calibri"/>
-                <a:sym typeface="Calibri"/>
-              </a:rPr>
-              <a:t>READINESS SNAPSHOT</a:t>
-            </a:r>
-            <a:endParaRPr b="0" i="0" sz="1100" u="none" cap="none" strike="noStrike">
-              <a:solidFill>
-                <a:schemeClr val="dk1"/>
-              </a:solidFill>
-              <a:latin typeface="Calibri"/>
-              <a:ea typeface="Calibri"/>
-              <a:cs typeface="Calibri"/>
-              <a:sym typeface="Calibri"/>
-            </a:endParaRPr>
-          </a:p>
-        </p:txBody>
-      </p:sp>
-      <p:sp>
-        <p:nvSpPr>
-          <p:cNvPr id="655" name="Google Shape;655;p16"/>
-          <p:cNvSpPr/>
-          <p:nvPr/>
-        </p:nvSpPr>
-        <p:spPr>
-          <a:xfrm>
-            <a:off x="886968" y="4910328"/>
-            <a:ext cx="164592" cy="164592"/>
-          </a:xfrm>
-          <a:prstGeom prst="ellipse">
-            <a:avLst/>
-          </a:prstGeom>
-          <a:solidFill>
-            <a:srgbClr val="6C7CD6"/>
-          </a:solidFill>
-          <a:ln>
-            <a:noFill/>
-          </a:ln>
-        </p:spPr>
-        <p:txBody>
-          <a:bodyPr anchorCtr="0" anchor="ctr" bIns="91425" lIns="91425" spcFirstLastPara="1" rIns="91425" wrap="square" tIns="91425">
-            <a:noAutofit/>
-          </a:bodyPr>
-          <a:lstStyle/>
-          <a:p>
-            <a:pPr indent="0" lvl="0" marL="0" rtl="0" algn="l">
-              <a:spcBef>
-                <a:spcPts val="0"/>
-              </a:spcBef>
-              <a:spcAft>
-                <a:spcPts val="0"/>
-              </a:spcAft>
-              <a:buNone/>
-            </a:pPr>
-            <a:r>
-              <a:t/>
-            </a:r>
-            <a:endParaRPr/>
-          </a:p>
-        </p:txBody>
-      </p:sp>
-      <p:sp>
-        <p:nvSpPr>
-          <p:cNvPr id="656" name="Google Shape;656;p16"/>
-          <p:cNvSpPr/>
-          <p:nvPr/>
-        </p:nvSpPr>
-        <p:spPr>
-          <a:xfrm>
-            <a:off x="1143000" y="4837176"/>
-            <a:ext cx="3106826" cy="320040"/>
-          </a:xfrm>
-          <a:prstGeom prst="rect">
-            <a:avLst/>
-          </a:prstGeom>
-          <a:noFill/>
-          <a:ln>
-            <a:noFill/>
-          </a:ln>
-        </p:spPr>
-        <p:txBody>
-          <a:bodyPr anchorCtr="0" anchor="ctr" bIns="0" lIns="0" spcFirstLastPara="1" rIns="0" wrap="square" tIns="0">
-            <a:noAutofit/>
-          </a:bodyPr>
-          <a:lstStyle/>
-          <a:p>
-            <a:pPr indent="0" lvl="0" marL="0" marR="0" rtl="0" algn="l">
-              <a:spcBef>
-                <a:spcPts val="0"/>
-              </a:spcBef>
-              <a:spcAft>
-                <a:spcPts val="0"/>
-              </a:spcAft>
-              <a:buClr>
-                <a:srgbClr val="FFFFFF"/>
-              </a:buClr>
-              <a:buSzPts val="1350"/>
-              <a:buFont typeface="Calibri"/>
-              <a:buNone/>
-            </a:pPr>
-            <a:r>
-              <a:rPr b="1" i="0" lang="en-US" sz="1350" u="none" cap="none" strike="noStrike">
-                <a:solidFill>
-                  <a:srgbClr val="FFFFFF"/>
-                </a:solidFill>
-                <a:latin typeface="Calibri"/>
-                <a:ea typeface="Calibri"/>
-                <a:cs typeface="Calibri"/>
-                <a:sym typeface="Calibri"/>
-              </a:rPr>
-              <a:t>Ready behind mitigations</a:t>
-            </a:r>
-            <a:endParaRPr b="0" i="0" sz="1350" u="none" cap="none" strike="noStrike">
-              <a:solidFill>
-                <a:schemeClr val="dk1"/>
-              </a:solidFill>
-              <a:latin typeface="Calibri"/>
-              <a:ea typeface="Calibri"/>
-              <a:cs typeface="Calibri"/>
-              <a:sym typeface="Calibri"/>
-            </a:endParaRPr>
-          </a:p>
-        </p:txBody>
-      </p:sp>
-      <p:sp>
-        <p:nvSpPr>
-          <p:cNvPr id="657" name="Google Shape;657;p16"/>
-          <p:cNvSpPr/>
-          <p:nvPr/>
-        </p:nvSpPr>
-        <p:spPr>
-          <a:xfrm>
-            <a:off x="1143000" y="5166360"/>
-            <a:ext cx="3015386" cy="640080"/>
-          </a:xfrm>
-          <a:prstGeom prst="rect">
-            <a:avLst/>
-          </a:prstGeom>
-          <a:noFill/>
-          <a:ln>
-            <a:noFill/>
-          </a:ln>
-        </p:spPr>
-        <p:txBody>
-          <a:bodyPr anchorCtr="0" anchor="ctr" bIns="0" lIns="0" spcFirstLastPara="1" rIns="0" wrap="square" tIns="0">
-            <a:noAutofit/>
-          </a:bodyPr>
-          <a:lstStyle/>
-          <a:p>
-            <a:pPr indent="0" lvl="0" marL="0" marR="0" rtl="0" algn="l">
-              <a:lnSpc>
-                <a:spcPct val="127272"/>
-              </a:lnSpc>
-              <a:spcBef>
-                <a:spcPts val="0"/>
-              </a:spcBef>
-              <a:spcAft>
-                <a:spcPts val="0"/>
-              </a:spcAft>
-              <a:buClr>
-                <a:srgbClr val="9FB2CC"/>
-              </a:buClr>
-              <a:buSzPts val="1100"/>
-              <a:buFont typeface="Calibri"/>
-              <a:buNone/>
-            </a:pPr>
-            <a:r>
-              <a:rPr b="0" i="0" lang="en-US" sz="1100" u="none" cap="none" strike="noStrike">
-                <a:solidFill>
-                  <a:srgbClr val="9FB2CC"/>
-                </a:solidFill>
-                <a:latin typeface="Calibri"/>
-                <a:ea typeface="Calibri"/>
-                <a:cs typeface="Calibri"/>
-                <a:sym typeface="Calibri"/>
-              </a:rPr>
-              <a:t>Driver Activity · Seat Belt · Smoking / Drinking</a:t>
-            </a:r>
-            <a:endParaRPr b="0" i="0" sz="1100" u="none" cap="none" strike="noStrike">
-              <a:solidFill>
-                <a:schemeClr val="dk1"/>
-              </a:solidFill>
-              <a:latin typeface="Calibri"/>
-              <a:ea typeface="Calibri"/>
-              <a:cs typeface="Calibri"/>
-              <a:sym typeface="Calibri"/>
-            </a:endParaRPr>
-          </a:p>
-        </p:txBody>
-      </p:sp>
-      <p:sp>
-        <p:nvSpPr>
-          <p:cNvPr id="658" name="Google Shape;658;p16"/>
-          <p:cNvSpPr/>
-          <p:nvPr/>
-        </p:nvSpPr>
-        <p:spPr>
-          <a:xfrm>
-            <a:off x="4359554" y="4910328"/>
-            <a:ext cx="164592" cy="164592"/>
-          </a:xfrm>
-          <a:prstGeom prst="ellipse">
-            <a:avLst/>
-          </a:prstGeom>
-          <a:solidFill>
-            <a:srgbClr val="3EA98C"/>
-          </a:solidFill>
-          <a:ln>
-            <a:noFill/>
-          </a:ln>
-        </p:spPr>
-        <p:txBody>
-          <a:bodyPr anchorCtr="0" anchor="ctr" bIns="91425" lIns="91425" spcFirstLastPara="1" rIns="91425" wrap="square" tIns="91425">
-            <a:noAutofit/>
-          </a:bodyPr>
-          <a:lstStyle/>
-          <a:p>
-            <a:pPr indent="0" lvl="0" marL="0" rtl="0" algn="l">
-              <a:spcBef>
-                <a:spcPts val="0"/>
-              </a:spcBef>
-              <a:spcAft>
-                <a:spcPts val="0"/>
-              </a:spcAft>
-              <a:buNone/>
-            </a:pPr>
-            <a:r>
-              <a:t/>
-            </a:r>
-            <a:endParaRPr/>
-          </a:p>
-        </p:txBody>
-      </p:sp>
-      <p:sp>
-        <p:nvSpPr>
-          <p:cNvPr id="659" name="Google Shape;659;p16"/>
-          <p:cNvSpPr/>
-          <p:nvPr/>
-        </p:nvSpPr>
-        <p:spPr>
-          <a:xfrm>
-            <a:off x="4615586" y="4837176"/>
-            <a:ext cx="3106826" cy="320040"/>
-          </a:xfrm>
-          <a:prstGeom prst="rect">
-            <a:avLst/>
-          </a:prstGeom>
-          <a:noFill/>
-          <a:ln>
-            <a:noFill/>
-          </a:ln>
-        </p:spPr>
-        <p:txBody>
-          <a:bodyPr anchorCtr="0" anchor="ctr" bIns="0" lIns="0" spcFirstLastPara="1" rIns="0" wrap="square" tIns="0">
-            <a:noAutofit/>
-          </a:bodyPr>
-          <a:lstStyle/>
-          <a:p>
-            <a:pPr indent="0" lvl="0" marL="0" marR="0" rtl="0" algn="l">
-              <a:spcBef>
-                <a:spcPts val="0"/>
-              </a:spcBef>
-              <a:spcAft>
-                <a:spcPts val="0"/>
-              </a:spcAft>
-              <a:buClr>
-                <a:srgbClr val="FFFFFF"/>
-              </a:buClr>
-              <a:buSzPts val="1350"/>
-              <a:buFont typeface="Calibri"/>
-              <a:buNone/>
-            </a:pPr>
-            <a:r>
-              <a:rPr b="1" i="0" lang="en-US" sz="1350" u="none" cap="none" strike="noStrike">
-                <a:solidFill>
-                  <a:srgbClr val="FFFFFF"/>
-                </a:solidFill>
-                <a:latin typeface="Calibri"/>
-                <a:ea typeface="Calibri"/>
-                <a:cs typeface="Calibri"/>
-                <a:sym typeface="Calibri"/>
-              </a:rPr>
-              <a:t>Ready as fused signal</a:t>
-            </a:r>
-            <a:endParaRPr b="0" i="0" sz="1350" u="none" cap="none" strike="noStrike">
-              <a:solidFill>
-                <a:schemeClr val="dk1"/>
-              </a:solidFill>
-              <a:latin typeface="Calibri"/>
-              <a:ea typeface="Calibri"/>
-              <a:cs typeface="Calibri"/>
-              <a:sym typeface="Calibri"/>
-            </a:endParaRPr>
-          </a:p>
-        </p:txBody>
-      </p:sp>
-      <p:sp>
-        <p:nvSpPr>
-          <p:cNvPr id="660" name="Google Shape;660;p16"/>
-          <p:cNvSpPr/>
-          <p:nvPr/>
-        </p:nvSpPr>
-        <p:spPr>
-          <a:xfrm>
-            <a:off x="4615586" y="5166360"/>
-            <a:ext cx="3015386" cy="640080"/>
-          </a:xfrm>
-          <a:prstGeom prst="rect">
-            <a:avLst/>
-          </a:prstGeom>
-          <a:noFill/>
-          <a:ln>
-            <a:noFill/>
-          </a:ln>
-        </p:spPr>
-        <p:txBody>
-          <a:bodyPr anchorCtr="0" anchor="ctr" bIns="0" lIns="0" spcFirstLastPara="1" rIns="0" wrap="square" tIns="0">
-            <a:noAutofit/>
-          </a:bodyPr>
-          <a:lstStyle/>
-          <a:p>
-            <a:pPr indent="0" lvl="0" marL="0" marR="0" rtl="0" algn="l">
-              <a:lnSpc>
-                <a:spcPct val="127272"/>
-              </a:lnSpc>
-              <a:spcBef>
-                <a:spcPts val="0"/>
-              </a:spcBef>
-              <a:spcAft>
-                <a:spcPts val="0"/>
-              </a:spcAft>
-              <a:buClr>
-                <a:srgbClr val="9FB2CC"/>
-              </a:buClr>
-              <a:buSzPts val="1100"/>
-              <a:buFont typeface="Calibri"/>
-              <a:buNone/>
-            </a:pPr>
-            <a:r>
-              <a:rPr b="0" i="0" lang="en-US" sz="1100" u="none" cap="none" strike="noStrike">
-                <a:solidFill>
-                  <a:srgbClr val="9FB2CC"/>
-                </a:solidFill>
-                <a:latin typeface="Calibri"/>
-                <a:ea typeface="Calibri"/>
-                <a:cs typeface="Calibri"/>
-                <a:sym typeface="Calibri"/>
-              </a:rPr>
-              <a:t>Landmark Fatigue — validated threshold, interpretable</a:t>
-            </a:r>
-            <a:endParaRPr b="0" i="0" sz="1100" u="none" cap="none" strike="noStrike">
-              <a:solidFill>
-                <a:schemeClr val="dk1"/>
-              </a:solidFill>
-              <a:latin typeface="Calibri"/>
-              <a:ea typeface="Calibri"/>
-              <a:cs typeface="Calibri"/>
-              <a:sym typeface="Calibri"/>
-            </a:endParaRPr>
-          </a:p>
-        </p:txBody>
-      </p:sp>
-      <p:sp>
-        <p:nvSpPr>
-          <p:cNvPr id="661" name="Google Shape;661;p16"/>
-          <p:cNvSpPr/>
-          <p:nvPr/>
-        </p:nvSpPr>
-        <p:spPr>
-          <a:xfrm>
-            <a:off x="7832141" y="4910328"/>
-            <a:ext cx="164592" cy="164592"/>
-          </a:xfrm>
-          <a:prstGeom prst="ellipse">
-            <a:avLst/>
-          </a:prstGeom>
-          <a:solidFill>
-            <a:srgbClr val="D9534F"/>
-          </a:solidFill>
-          <a:ln>
-            <a:noFill/>
-          </a:ln>
-        </p:spPr>
-        <p:txBody>
-          <a:bodyPr anchorCtr="0" anchor="ctr" bIns="91425" lIns="91425" spcFirstLastPara="1" rIns="91425" wrap="square" tIns="91425">
-            <a:noAutofit/>
-          </a:bodyPr>
-          <a:lstStyle/>
-          <a:p>
-            <a:pPr indent="0" lvl="0" marL="0" rtl="0" algn="l">
-              <a:spcBef>
-                <a:spcPts val="0"/>
-              </a:spcBef>
-              <a:spcAft>
-                <a:spcPts val="0"/>
-              </a:spcAft>
-              <a:buNone/>
-            </a:pPr>
-            <a:r>
-              <a:t/>
-            </a:r>
-            <a:endParaRPr/>
-          </a:p>
-        </p:txBody>
-      </p:sp>
-      <p:sp>
-        <p:nvSpPr>
-          <p:cNvPr id="662" name="Google Shape;662;p16"/>
-          <p:cNvSpPr/>
-          <p:nvPr/>
-        </p:nvSpPr>
-        <p:spPr>
-          <a:xfrm>
-            <a:off x="8088173" y="4837176"/>
-            <a:ext cx="3106826" cy="320040"/>
-          </a:xfrm>
-          <a:prstGeom prst="rect">
-            <a:avLst/>
-          </a:prstGeom>
-          <a:noFill/>
-          <a:ln>
-            <a:noFill/>
-          </a:ln>
-        </p:spPr>
-        <p:txBody>
-          <a:bodyPr anchorCtr="0" anchor="ctr" bIns="0" lIns="0" spcFirstLastPara="1" rIns="0" wrap="square" tIns="0">
-            <a:noAutofit/>
-          </a:bodyPr>
-          <a:lstStyle/>
-          <a:p>
-            <a:pPr indent="0" lvl="0" marL="0" marR="0" rtl="0" algn="l">
-              <a:spcBef>
-                <a:spcPts val="0"/>
-              </a:spcBef>
-              <a:spcAft>
-                <a:spcPts val="0"/>
-              </a:spcAft>
-              <a:buClr>
-                <a:srgbClr val="FFFFFF"/>
-              </a:buClr>
-              <a:buSzPts val="1350"/>
-              <a:buFont typeface="Calibri"/>
-              <a:buNone/>
-            </a:pPr>
-            <a:r>
-              <a:rPr b="1" i="0" lang="en-US" sz="1350" u="none" cap="none" strike="noStrike">
-                <a:solidFill>
-                  <a:srgbClr val="FFFFFF"/>
-                </a:solidFill>
-                <a:latin typeface="Calibri"/>
-                <a:ea typeface="Calibri"/>
-                <a:cs typeface="Calibri"/>
-                <a:sym typeface="Calibri"/>
-              </a:rPr>
-              <a:t>Experimental only</a:t>
-            </a:r>
-            <a:endParaRPr b="0" i="0" sz="1350" u="none" cap="none" strike="noStrike">
-              <a:solidFill>
-                <a:schemeClr val="dk1"/>
-              </a:solidFill>
-              <a:latin typeface="Calibri"/>
-              <a:ea typeface="Calibri"/>
-              <a:cs typeface="Calibri"/>
-              <a:sym typeface="Calibri"/>
-            </a:endParaRPr>
-          </a:p>
-        </p:txBody>
-      </p:sp>
-      <p:sp>
-        <p:nvSpPr>
-          <p:cNvPr id="663" name="Google Shape;663;p16"/>
-          <p:cNvSpPr/>
-          <p:nvPr/>
-        </p:nvSpPr>
-        <p:spPr>
-          <a:xfrm>
-            <a:off x="8088173" y="5166360"/>
-            <a:ext cx="3015386" cy="640080"/>
-          </a:xfrm>
-          <a:prstGeom prst="rect">
-            <a:avLst/>
-          </a:prstGeom>
-          <a:noFill/>
-          <a:ln>
-            <a:noFill/>
-          </a:ln>
-        </p:spPr>
-        <p:txBody>
-          <a:bodyPr anchorCtr="0" anchor="ctr" bIns="0" lIns="0" spcFirstLastPara="1" rIns="0" wrap="square" tIns="0">
-            <a:noAutofit/>
-          </a:bodyPr>
-          <a:lstStyle/>
-          <a:p>
-            <a:pPr indent="0" lvl="0" marL="0" marR="0" rtl="0" algn="l">
-              <a:lnSpc>
-                <a:spcPct val="127272"/>
-              </a:lnSpc>
-              <a:spcBef>
-                <a:spcPts val="0"/>
-              </a:spcBef>
-              <a:spcAft>
-                <a:spcPts val="0"/>
-              </a:spcAft>
-              <a:buClr>
-                <a:srgbClr val="9FB2CC"/>
-              </a:buClr>
-              <a:buSzPts val="1100"/>
-              <a:buFont typeface="Calibri"/>
-              <a:buNone/>
-            </a:pPr>
-            <a:r>
-              <a:rPr b="0" i="0" lang="en-US" sz="1100" u="none" cap="none" strike="noStrike">
-                <a:solidFill>
-                  <a:srgbClr val="9FB2CC"/>
-                </a:solidFill>
-                <a:latin typeface="Calibri"/>
-                <a:ea typeface="Calibri"/>
-                <a:cs typeface="Calibri"/>
-                <a:sym typeface="Calibri"/>
-              </a:rPr>
-              <a:t>Video Fatigue — class collapse, needs re-work</a:t>
-            </a:r>
-            <a:endParaRPr b="0" i="0" sz="1100" u="none" cap="none" strike="noStrike">
-              <a:solidFill>
-                <a:schemeClr val="dk1"/>
-              </a:solidFill>
-              <a:latin typeface="Calibri"/>
-              <a:ea typeface="Calibri"/>
-              <a:cs typeface="Calibri"/>
-              <a:sym typeface="Calibri"/>
-            </a:endParaRPr>
-          </a:p>
-        </p:txBody>
-      </p:sp>
-    </p:spTree>
-  </p:cSld>
-  <p:clrMapOvr>
-    <a:masterClrMapping/>
-  </p:clrMapOvr>
-</p:sld>
-</file>
-
-<file path=ppt/slides/slide17.xml><?xml version="1.0" encoding="utf-8"?>
-<p:sld xmlns:a="http://schemas.openxmlformats.org/drawingml/2006/main" xmlns:r="http://schemas.openxmlformats.org/officeDocument/2006/relationships" xmlns:mc="http://schemas.openxmlformats.org/markup-compatibility/2006" xmlns:mv="urn:schemas-microsoft-com:mac:vml" xmlns:p="http://schemas.openxmlformats.org/presentationml/2006/main" xmlns:c="http://schemas.openxmlformats.org/drawingml/2006/chart" xmlns:dgm="http://schemas.openxmlformats.org/drawingml/2006/diagram" xmlns:o="urn:schemas-microsoft-com:office:office" xmlns:v="urn:schemas-microsoft-com:vml" xmlns:pvml="urn:schemas-microsoft-com:office:powerpoint" xmlns:com="http://schemas.openxmlformats.org/drawingml/2006/compatibility" xmlns:p14="http://schemas.microsoft.com/office/powerpoint/2010/main" xmlns:p15="http://schemas.microsoft.com/office/powerpoint/2012/main" xmlns:ahyp="http://schemas.microsoft.com/office/drawing/2018/hyperlinkcolor">
-  <p:cSld>
-    <p:bg>
-      <p:bgPr>
-        <a:solidFill>
-          <a:srgbClr val="0E1A2E"/>
-        </a:solidFill>
-      </p:bgPr>
-    </p:bg>
-    <p:spTree>
-      <p:nvGrpSpPr>
-        <p:cNvPr id="668" name="Shape 668"/>
-        <p:cNvGrpSpPr/>
-        <p:nvPr/>
-      </p:nvGrpSpPr>
-      <p:grpSpPr>
-        <a:xfrm>
-          <a:off x="0" y="0"/>
-          <a:ext cx="0" cy="0"/>
-          <a:chOff x="0" y="0"/>
-          <a:chExt cx="0" cy="0"/>
-        </a:xfrm>
-      </p:grpSpPr>
-      <p:sp>
-        <p:nvSpPr>
-          <p:cNvPr id="669" name="Google Shape;669;p17"/>
-          <p:cNvSpPr/>
-          <p:nvPr/>
-        </p:nvSpPr>
-        <p:spPr>
-          <a:xfrm>
-            <a:off x="566928" y="6446520"/>
-            <a:ext cx="7315200" cy="274320"/>
-          </a:xfrm>
-          <a:prstGeom prst="rect">
-            <a:avLst/>
-          </a:prstGeom>
-          <a:noFill/>
-          <a:ln>
-            <a:noFill/>
-          </a:ln>
-        </p:spPr>
-        <p:txBody>
-          <a:bodyPr anchorCtr="0" anchor="ctr" bIns="0" lIns="0" spcFirstLastPara="1" rIns="0" wrap="square" tIns="0">
-            <a:noAutofit/>
-          </a:bodyPr>
-          <a:lstStyle/>
-          <a:p>
-            <a:pPr indent="0" lvl="0" marL="0" marR="0" rtl="0" algn="l">
-              <a:spcBef>
-                <a:spcPts val="0"/>
-              </a:spcBef>
-              <a:spcAft>
-                <a:spcPts val="0"/>
-              </a:spcAft>
-              <a:buClr>
-                <a:srgbClr val="6E809E"/>
-              </a:buClr>
-              <a:buSzPts val="900"/>
-              <a:buFont typeface="Calibri"/>
-              <a:buNone/>
-            </a:pPr>
-            <a:r>
-              <a:rPr b="0" i="0" lang="en-US" sz="900" u="none" cap="none" strike="noStrike">
-                <a:solidFill>
-                  <a:srgbClr val="6E809E"/>
-                </a:solidFill>
-                <a:latin typeface="Calibri"/>
-                <a:ea typeface="Calibri"/>
-                <a:cs typeface="Calibri"/>
-                <a:sym typeface="Calibri"/>
-              </a:rPr>
-              <a:t>Driver Wellness &amp; Safety Monitoring   ·   Milestone 5</a:t>
-            </a:r>
-            <a:endParaRPr b="0" i="0" sz="900" u="none" cap="none" strike="noStrike">
-              <a:solidFill>
-                <a:schemeClr val="dk1"/>
-              </a:solidFill>
-              <a:latin typeface="Calibri"/>
-              <a:ea typeface="Calibri"/>
-              <a:cs typeface="Calibri"/>
-              <a:sym typeface="Calibri"/>
-            </a:endParaRPr>
-          </a:p>
-        </p:txBody>
-      </p:sp>
-      <p:sp>
-        <p:nvSpPr>
-          <p:cNvPr id="670" name="Google Shape;670;p17"/>
-          <p:cNvSpPr/>
-          <p:nvPr/>
-        </p:nvSpPr>
-        <p:spPr>
-          <a:xfrm>
-            <a:off x="11247120" y="6446520"/>
-            <a:ext cx="548640" cy="274320"/>
-          </a:xfrm>
-          <a:prstGeom prst="rect">
-            <a:avLst/>
-          </a:prstGeom>
-          <a:noFill/>
-          <a:ln>
-            <a:noFill/>
-          </a:ln>
-        </p:spPr>
-        <p:txBody>
-          <a:bodyPr anchorCtr="0" anchor="ctr" bIns="0" lIns="0" spcFirstLastPara="1" rIns="0" wrap="square" tIns="0">
-            <a:noAutofit/>
-          </a:bodyPr>
-          <a:lstStyle/>
-          <a:p>
-            <a:pPr indent="0" lvl="0" marL="0" marR="0" rtl="0" algn="r">
-              <a:spcBef>
-                <a:spcPts val="0"/>
-              </a:spcBef>
-              <a:spcAft>
-                <a:spcPts val="0"/>
-              </a:spcAft>
-              <a:buClr>
-                <a:srgbClr val="6E809E"/>
-              </a:buClr>
-              <a:buSzPts val="900"/>
-              <a:buFont typeface="Calibri"/>
-              <a:buNone/>
-            </a:pPr>
-            <a:r>
-              <a:rPr b="0" i="0" lang="en-US" sz="900" u="none" cap="none" strike="noStrike">
-                <a:solidFill>
-                  <a:srgbClr val="6E809E"/>
-                </a:solidFill>
-                <a:latin typeface="Calibri"/>
-                <a:ea typeface="Calibri"/>
-                <a:cs typeface="Calibri"/>
-                <a:sym typeface="Calibri"/>
-              </a:rPr>
-              <a:t>17</a:t>
-            </a:r>
-            <a:endParaRPr b="0" i="0" sz="900" u="none" cap="none" strike="noStrike">
-              <a:solidFill>
-                <a:schemeClr val="dk1"/>
-              </a:solidFill>
-              <a:latin typeface="Calibri"/>
-              <a:ea typeface="Calibri"/>
-              <a:cs typeface="Calibri"/>
-              <a:sym typeface="Calibri"/>
-            </a:endParaRPr>
-          </a:p>
-        </p:txBody>
-      </p:sp>
-      <p:sp>
-        <p:nvSpPr>
-          <p:cNvPr id="671" name="Google Shape;671;p17"/>
-          <p:cNvSpPr/>
-          <p:nvPr/>
-        </p:nvSpPr>
-        <p:spPr>
-          <a:xfrm>
-            <a:off x="9326880" y="-1280160"/>
-            <a:ext cx="4206240" cy="4206240"/>
-          </a:xfrm>
-          <a:prstGeom prst="ellipse">
-            <a:avLst/>
-          </a:prstGeom>
-          <a:noFill/>
-          <a:ln cap="flat" cmpd="sng" w="27925">
-            <a:solidFill>
-              <a:srgbClr val="1C2C48"/>
-            </a:solidFill>
-            <a:prstDash val="solid"/>
-            <a:round/>
-            <a:headEnd len="sm" w="sm" type="none"/>
-            <a:tailEnd len="sm" w="sm" type="none"/>
-          </a:ln>
-        </p:spPr>
-        <p:txBody>
-          <a:bodyPr anchorCtr="0" anchor="ctr" bIns="91425" lIns="91425" spcFirstLastPara="1" rIns="91425" wrap="square" tIns="91425">
-            <a:noAutofit/>
-          </a:bodyPr>
-          <a:lstStyle/>
-          <a:p>
-            <a:pPr indent="0" lvl="0" marL="0" rtl="0" algn="l">
-              <a:spcBef>
-                <a:spcPts val="0"/>
-              </a:spcBef>
-              <a:spcAft>
-                <a:spcPts val="0"/>
-              </a:spcAft>
-              <a:buNone/>
-            </a:pPr>
-            <a:r>
-              <a:t/>
-            </a:r>
-            <a:endParaRPr/>
-          </a:p>
-        </p:txBody>
-      </p:sp>
-      <p:sp>
-        <p:nvSpPr>
-          <p:cNvPr id="672" name="Google Shape;672;p17"/>
-          <p:cNvSpPr/>
-          <p:nvPr/>
-        </p:nvSpPr>
-        <p:spPr>
-          <a:xfrm>
-            <a:off x="10195560" y="-411480"/>
-            <a:ext cx="2468880" cy="2468880"/>
-          </a:xfrm>
-          <a:prstGeom prst="ellipse">
-            <a:avLst/>
-          </a:prstGeom>
-          <a:solidFill>
-            <a:srgbClr val="13233E"/>
-          </a:solidFill>
-          <a:ln>
-            <a:noFill/>
-          </a:ln>
-        </p:spPr>
-        <p:txBody>
-          <a:bodyPr anchorCtr="0" anchor="ctr" bIns="91425" lIns="91425" spcFirstLastPara="1" rIns="91425" wrap="square" tIns="91425">
-            <a:noAutofit/>
-          </a:bodyPr>
-          <a:lstStyle/>
-          <a:p>
-            <a:pPr indent="0" lvl="0" marL="0" rtl="0" algn="l">
-              <a:spcBef>
-                <a:spcPts val="0"/>
-              </a:spcBef>
-              <a:spcAft>
-                <a:spcPts val="0"/>
-              </a:spcAft>
-              <a:buNone/>
-            </a:pPr>
-            <a:r>
-              <a:t/>
-            </a:r>
-            <a:endParaRPr/>
-          </a:p>
-        </p:txBody>
-      </p:sp>
-      <p:sp>
-        <p:nvSpPr>
-          <p:cNvPr id="673" name="Google Shape;673;p17"/>
-          <p:cNvSpPr/>
-          <p:nvPr/>
-        </p:nvSpPr>
-        <p:spPr>
-          <a:xfrm>
-            <a:off x="566928" y="548640"/>
-            <a:ext cx="9144000" cy="274320"/>
-          </a:xfrm>
-          <a:prstGeom prst="rect">
-            <a:avLst/>
-          </a:prstGeom>
-          <a:noFill/>
-          <a:ln>
-            <a:noFill/>
-          </a:ln>
-        </p:spPr>
-        <p:txBody>
-          <a:bodyPr anchorCtr="0" anchor="ctr" bIns="0" lIns="0" spcFirstLastPara="1" rIns="0" wrap="square" tIns="0">
-            <a:noAutofit/>
-          </a:bodyPr>
-          <a:lstStyle/>
-          <a:p>
-            <a:pPr indent="0" lvl="0" marL="0" marR="0" rtl="0" algn="l">
-              <a:spcBef>
-                <a:spcPts val="0"/>
-              </a:spcBef>
-              <a:spcAft>
-                <a:spcPts val="0"/>
-              </a:spcAft>
-              <a:buClr>
-                <a:srgbClr val="2DD4BF"/>
-              </a:buClr>
-              <a:buSzPts val="1200"/>
-              <a:buFont typeface="Calibri"/>
-              <a:buNone/>
-            </a:pPr>
-            <a:r>
-              <a:rPr b="1" i="0" lang="en-US" sz="1200" u="none" cap="none" strike="noStrike">
-                <a:solidFill>
-                  <a:srgbClr val="2DD4BF"/>
-                </a:solidFill>
-                <a:latin typeface="Calibri"/>
-                <a:ea typeface="Calibri"/>
-                <a:cs typeface="Calibri"/>
-                <a:sym typeface="Calibri"/>
-              </a:rPr>
-              <a:t>MILESTONE 5  ·  CONCLUSION</a:t>
-            </a:r>
-            <a:endParaRPr b="0" i="0" sz="1200" u="none" cap="none" strike="noStrike">
-              <a:solidFill>
-                <a:schemeClr val="dk1"/>
-              </a:solidFill>
-              <a:latin typeface="Calibri"/>
-              <a:ea typeface="Calibri"/>
-              <a:cs typeface="Calibri"/>
-              <a:sym typeface="Calibri"/>
-            </a:endParaRPr>
-          </a:p>
-        </p:txBody>
-      </p:sp>
-      <p:sp>
-        <p:nvSpPr>
-          <p:cNvPr id="674" name="Google Shape;674;p17"/>
-          <p:cNvSpPr/>
-          <p:nvPr/>
-        </p:nvSpPr>
-        <p:spPr>
-          <a:xfrm>
-            <a:off x="566928" y="960120"/>
-            <a:ext cx="10058400" cy="1280160"/>
-          </a:xfrm>
-          <a:prstGeom prst="rect">
-            <a:avLst/>
-          </a:prstGeom>
-          <a:noFill/>
-          <a:ln>
-            <a:noFill/>
-          </a:ln>
-        </p:spPr>
-        <p:txBody>
-          <a:bodyPr anchorCtr="0" anchor="ctr" bIns="0" lIns="0" spcFirstLastPara="1" rIns="0" wrap="square" tIns="0">
-            <a:noAutofit/>
-          </a:bodyPr>
-          <a:lstStyle/>
-          <a:p>
-            <a:pPr indent="0" lvl="0" marL="0" marR="0" rtl="0" algn="l">
-              <a:lnSpc>
-                <a:spcPct val="104999"/>
-              </a:lnSpc>
-              <a:spcBef>
-                <a:spcPts val="0"/>
-              </a:spcBef>
-              <a:spcAft>
-                <a:spcPts val="0"/>
-              </a:spcAft>
-              <a:buClr>
-                <a:srgbClr val="FFFFFF"/>
-              </a:buClr>
-              <a:buSzPts val="4000"/>
-              <a:buFont typeface="Century Schoolbook"/>
-              <a:buNone/>
-            </a:pPr>
-            <a:r>
-              <a:rPr b="1" i="0" lang="en-US" sz="4000" u="none" cap="none" strike="noStrike">
-                <a:solidFill>
-                  <a:srgbClr val="FFFFFF"/>
-                </a:solidFill>
-                <a:latin typeface="Century Schoolbook"/>
-                <a:ea typeface="Century Schoolbook"/>
-                <a:cs typeface="Century Schoolbook"/>
-                <a:sym typeface="Century Schoolbook"/>
-              </a:rPr>
-              <a:t>Five Modules Independently</a:t>
-            </a:r>
-            <a:endParaRPr b="0" i="0" sz="4000" u="none" cap="none" strike="noStrike">
-              <a:solidFill>
-                <a:schemeClr val="dk1"/>
-              </a:solidFill>
-              <a:latin typeface="Calibri"/>
-              <a:ea typeface="Calibri"/>
-              <a:cs typeface="Calibri"/>
-              <a:sym typeface="Calibri"/>
-            </a:endParaRPr>
-          </a:p>
-          <a:p>
-            <a:pPr indent="0" lvl="0" marL="0" marR="0" rtl="0" algn="l">
-              <a:lnSpc>
-                <a:spcPct val="104999"/>
-              </a:lnSpc>
-              <a:spcBef>
-                <a:spcPts val="0"/>
-              </a:spcBef>
-              <a:spcAft>
-                <a:spcPts val="0"/>
-              </a:spcAft>
-              <a:buClr>
-                <a:srgbClr val="FFFFFF"/>
-              </a:buClr>
-              <a:buSzPts val="4000"/>
-              <a:buFont typeface="Century Schoolbook"/>
-              <a:buNone/>
-            </a:pPr>
-            <a:r>
-              <a:rPr b="1" i="0" lang="en-US" sz="4000" u="none" cap="none" strike="noStrike">
-                <a:solidFill>
-                  <a:srgbClr val="FFFFFF"/>
-                </a:solidFill>
-                <a:latin typeface="Century Schoolbook"/>
-                <a:ea typeface="Century Schoolbook"/>
-                <a:cs typeface="Century Schoolbook"/>
-                <a:sym typeface="Century Schoolbook"/>
-              </a:rPr>
-              <a:t>Evaluated &amp; Diagnosed</a:t>
-            </a:r>
-            <a:endParaRPr b="0" i="0" sz="4000" u="none" cap="none" strike="noStrike">
-              <a:solidFill>
-                <a:schemeClr val="dk1"/>
-              </a:solidFill>
-              <a:latin typeface="Calibri"/>
-              <a:ea typeface="Calibri"/>
-              <a:cs typeface="Calibri"/>
-              <a:sym typeface="Calibri"/>
-            </a:endParaRPr>
-          </a:p>
-        </p:txBody>
-      </p:sp>
-      <p:sp>
-        <p:nvSpPr>
-          <p:cNvPr id="675" name="Google Shape;675;p17"/>
-          <p:cNvSpPr/>
-          <p:nvPr/>
-        </p:nvSpPr>
-        <p:spPr>
-          <a:xfrm>
-            <a:off x="566928" y="2788920"/>
-            <a:ext cx="2490140" cy="1325880"/>
-          </a:xfrm>
-          <a:prstGeom prst="roundRect">
-            <a:avLst>
-              <a:gd fmla="val 6897" name="adj"/>
-            </a:avLst>
-          </a:prstGeom>
-          <a:solidFill>
-            <a:srgbClr val="16233D"/>
-          </a:solidFill>
-          <a:ln>
-            <a:noFill/>
-          </a:ln>
-          <a:effectLst>
-            <a:outerShdw blurRad="114300" rotWithShape="0" algn="bl" dir="5400000" dist="38100">
-              <a:srgbClr val="000000">
-                <a:alpha val="27843"/>
-              </a:srgbClr>
-            </a:outerShdw>
-          </a:effectLst>
-        </p:spPr>
-        <p:txBody>
-          <a:bodyPr anchorCtr="0" anchor="ctr" bIns="91425" lIns="91425" spcFirstLastPara="1" rIns="91425" wrap="square" tIns="91425">
-            <a:noAutofit/>
-          </a:bodyPr>
-          <a:lstStyle/>
-          <a:p>
-            <a:pPr indent="0" lvl="0" marL="0" rtl="0" algn="l">
-              <a:spcBef>
-                <a:spcPts val="0"/>
-              </a:spcBef>
-              <a:spcAft>
-                <a:spcPts val="0"/>
-              </a:spcAft>
-              <a:buNone/>
-            </a:pPr>
-            <a:r>
-              <a:t/>
-            </a:r>
-            <a:endParaRPr/>
-          </a:p>
-        </p:txBody>
-      </p:sp>
-      <p:sp>
-        <p:nvSpPr>
-          <p:cNvPr id="676" name="Google Shape;676;p17"/>
-          <p:cNvSpPr/>
-          <p:nvPr/>
-        </p:nvSpPr>
-        <p:spPr>
-          <a:xfrm>
-            <a:off x="566928" y="2926080"/>
-            <a:ext cx="2490140" cy="685800"/>
-          </a:xfrm>
-          <a:prstGeom prst="rect">
-            <a:avLst/>
-          </a:prstGeom>
-          <a:noFill/>
-          <a:ln>
-            <a:noFill/>
-          </a:ln>
-        </p:spPr>
-        <p:txBody>
-          <a:bodyPr anchorCtr="0" anchor="ctr" bIns="0" lIns="0" spcFirstLastPara="1" rIns="0" wrap="square" tIns="0">
-            <a:noAutofit/>
-          </a:bodyPr>
-          <a:lstStyle/>
-          <a:p>
-            <a:pPr indent="0" lvl="0" marL="0" marR="0" rtl="0" algn="ctr">
-              <a:spcBef>
-                <a:spcPts val="0"/>
-              </a:spcBef>
-              <a:spcAft>
-                <a:spcPts val="0"/>
-              </a:spcAft>
-              <a:buClr>
-                <a:srgbClr val="2DD4BF"/>
-              </a:buClr>
-              <a:buSzPts val="4400"/>
-              <a:buFont typeface="Century Schoolbook"/>
-              <a:buNone/>
-            </a:pPr>
-            <a:r>
-              <a:rPr b="1" i="0" lang="en-US" sz="4400" u="none" cap="none" strike="noStrike">
-                <a:solidFill>
-                  <a:srgbClr val="2DD4BF"/>
-                </a:solidFill>
-                <a:latin typeface="Century Schoolbook"/>
-                <a:ea typeface="Century Schoolbook"/>
-                <a:cs typeface="Century Schoolbook"/>
-                <a:sym typeface="Century Schoolbook"/>
-              </a:rPr>
-              <a:t>5</a:t>
-            </a:r>
-            <a:endParaRPr b="0" i="0" sz="4400" u="none" cap="none" strike="noStrike">
-              <a:solidFill>
-                <a:schemeClr val="dk1"/>
-              </a:solidFill>
-              <a:latin typeface="Calibri"/>
-              <a:ea typeface="Calibri"/>
-              <a:cs typeface="Calibri"/>
-              <a:sym typeface="Calibri"/>
-            </a:endParaRPr>
-          </a:p>
-        </p:txBody>
-      </p:sp>
-      <p:sp>
-        <p:nvSpPr>
-          <p:cNvPr id="677" name="Google Shape;677;p17"/>
-          <p:cNvSpPr/>
-          <p:nvPr/>
-        </p:nvSpPr>
-        <p:spPr>
-          <a:xfrm>
-            <a:off x="704088" y="3685032"/>
-            <a:ext cx="2215820" cy="365760"/>
-          </a:xfrm>
-          <a:prstGeom prst="rect">
-            <a:avLst/>
-          </a:prstGeom>
-          <a:noFill/>
-          <a:ln>
-            <a:noFill/>
-          </a:ln>
-        </p:spPr>
-        <p:txBody>
-          <a:bodyPr anchorCtr="0" anchor="ctr" bIns="0" lIns="0" spcFirstLastPara="1" rIns="0" wrap="square" tIns="0">
-            <a:noAutofit/>
-          </a:bodyPr>
-          <a:lstStyle/>
-          <a:p>
-            <a:pPr indent="0" lvl="0" marL="0" marR="0" rtl="0" algn="ctr">
-              <a:lnSpc>
-                <a:spcPct val="113043"/>
-              </a:lnSpc>
-              <a:spcBef>
-                <a:spcPts val="0"/>
-              </a:spcBef>
-              <a:spcAft>
-                <a:spcPts val="0"/>
-              </a:spcAft>
-              <a:buClr>
-                <a:srgbClr val="9FB2CC"/>
-              </a:buClr>
-              <a:buSzPts val="1150"/>
-              <a:buFont typeface="Calibri"/>
-              <a:buNone/>
-            </a:pPr>
-            <a:r>
-              <a:rPr b="0" i="0" lang="en-US" sz="1150" u="none" cap="none" strike="noStrike">
-                <a:solidFill>
-                  <a:srgbClr val="9FB2CC"/>
-                </a:solidFill>
-                <a:latin typeface="Calibri"/>
-                <a:ea typeface="Calibri"/>
-                <a:cs typeface="Calibri"/>
-                <a:sym typeface="Calibri"/>
-              </a:rPr>
-              <a:t>modules evaluated</a:t>
-            </a:r>
-            <a:endParaRPr b="0" i="0" sz="1150" u="none" cap="none" strike="noStrike">
-              <a:solidFill>
-                <a:schemeClr val="dk1"/>
-              </a:solidFill>
-              <a:latin typeface="Calibri"/>
-              <a:ea typeface="Calibri"/>
-              <a:cs typeface="Calibri"/>
-              <a:sym typeface="Calibri"/>
-            </a:endParaRPr>
-          </a:p>
-        </p:txBody>
-      </p:sp>
-      <p:sp>
-        <p:nvSpPr>
-          <p:cNvPr id="678" name="Google Shape;678;p17"/>
-          <p:cNvSpPr/>
-          <p:nvPr/>
-        </p:nvSpPr>
-        <p:spPr>
-          <a:xfrm>
-            <a:off x="3422828" y="2788920"/>
-            <a:ext cx="2490140" cy="1325880"/>
-          </a:xfrm>
-          <a:prstGeom prst="roundRect">
-            <a:avLst>
-              <a:gd fmla="val 6897" name="adj"/>
-            </a:avLst>
-          </a:prstGeom>
-          <a:solidFill>
-            <a:srgbClr val="16233D"/>
-          </a:solidFill>
-          <a:ln>
-            <a:noFill/>
-          </a:ln>
-          <a:effectLst>
-            <a:outerShdw blurRad="114300" rotWithShape="0" algn="bl" dir="5400000" dist="38100">
-              <a:srgbClr val="000000">
-                <a:alpha val="27843"/>
-              </a:srgbClr>
-            </a:outerShdw>
-          </a:effectLst>
-        </p:spPr>
-        <p:txBody>
-          <a:bodyPr anchorCtr="0" anchor="ctr" bIns="91425" lIns="91425" spcFirstLastPara="1" rIns="91425" wrap="square" tIns="91425">
-            <a:noAutofit/>
-          </a:bodyPr>
-          <a:lstStyle/>
-          <a:p>
-            <a:pPr indent="0" lvl="0" marL="0" rtl="0" algn="l">
-              <a:spcBef>
-                <a:spcPts val="0"/>
-              </a:spcBef>
-              <a:spcAft>
-                <a:spcPts val="0"/>
-              </a:spcAft>
-              <a:buNone/>
-            </a:pPr>
-            <a:r>
-              <a:t/>
-            </a:r>
-            <a:endParaRPr/>
-          </a:p>
-        </p:txBody>
-      </p:sp>
-      <p:sp>
-        <p:nvSpPr>
-          <p:cNvPr id="679" name="Google Shape;679;p17"/>
-          <p:cNvSpPr/>
-          <p:nvPr/>
-        </p:nvSpPr>
-        <p:spPr>
-          <a:xfrm>
-            <a:off x="3422828" y="2926080"/>
-            <a:ext cx="2490140" cy="685800"/>
-          </a:xfrm>
-          <a:prstGeom prst="rect">
-            <a:avLst/>
-          </a:prstGeom>
-          <a:noFill/>
-          <a:ln>
-            <a:noFill/>
-          </a:ln>
-        </p:spPr>
-        <p:txBody>
-          <a:bodyPr anchorCtr="0" anchor="ctr" bIns="0" lIns="0" spcFirstLastPara="1" rIns="0" wrap="square" tIns="0">
-            <a:noAutofit/>
-          </a:bodyPr>
-          <a:lstStyle/>
-          <a:p>
-            <a:pPr indent="0" lvl="0" marL="0" marR="0" rtl="0" algn="ctr">
-              <a:spcBef>
-                <a:spcPts val="0"/>
-              </a:spcBef>
-              <a:spcAft>
-                <a:spcPts val="0"/>
-              </a:spcAft>
-              <a:buClr>
-                <a:srgbClr val="2DD4BF"/>
-              </a:buClr>
-              <a:buSzPts val="4400"/>
-              <a:buFont typeface="Century Schoolbook"/>
-              <a:buNone/>
-            </a:pPr>
-            <a:r>
-              <a:rPr b="1" i="0" lang="en-US" sz="4400" u="none" cap="none" strike="noStrike">
-                <a:solidFill>
-                  <a:srgbClr val="2DD4BF"/>
-                </a:solidFill>
-                <a:latin typeface="Century Schoolbook"/>
-                <a:ea typeface="Century Schoolbook"/>
-                <a:cs typeface="Century Schoolbook"/>
-                <a:sym typeface="Century Schoolbook"/>
-              </a:rPr>
-              <a:t>5</a:t>
-            </a:r>
-            <a:endParaRPr b="0" i="0" sz="4400" u="none" cap="none" strike="noStrike">
-              <a:solidFill>
-                <a:schemeClr val="dk1"/>
-              </a:solidFill>
-              <a:latin typeface="Calibri"/>
-              <a:ea typeface="Calibri"/>
-              <a:cs typeface="Calibri"/>
-              <a:sym typeface="Calibri"/>
-            </a:endParaRPr>
-          </a:p>
-        </p:txBody>
-      </p:sp>
-      <p:sp>
-        <p:nvSpPr>
-          <p:cNvPr id="680" name="Google Shape;680;p17"/>
-          <p:cNvSpPr/>
-          <p:nvPr/>
-        </p:nvSpPr>
-        <p:spPr>
-          <a:xfrm>
-            <a:off x="3559988" y="3685032"/>
-            <a:ext cx="2215820" cy="365760"/>
-          </a:xfrm>
-          <a:prstGeom prst="rect">
-            <a:avLst/>
-          </a:prstGeom>
-          <a:noFill/>
-          <a:ln>
-            <a:noFill/>
-          </a:ln>
-        </p:spPr>
-        <p:txBody>
-          <a:bodyPr anchorCtr="0" anchor="ctr" bIns="0" lIns="0" spcFirstLastPara="1" rIns="0" wrap="square" tIns="0">
-            <a:noAutofit/>
-          </a:bodyPr>
-          <a:lstStyle/>
-          <a:p>
-            <a:pPr indent="0" lvl="0" marL="0" marR="0" rtl="0" algn="ctr">
-              <a:lnSpc>
-                <a:spcPct val="113043"/>
-              </a:lnSpc>
-              <a:spcBef>
-                <a:spcPts val="0"/>
-              </a:spcBef>
-              <a:spcAft>
-                <a:spcPts val="0"/>
-              </a:spcAft>
-              <a:buClr>
-                <a:srgbClr val="9FB2CC"/>
-              </a:buClr>
-              <a:buSzPts val="1150"/>
-              <a:buFont typeface="Calibri"/>
-              <a:buNone/>
-            </a:pPr>
-            <a:r>
-              <a:rPr b="0" i="0" lang="en-US" sz="1150" u="none" cap="none" strike="noStrike">
-                <a:solidFill>
-                  <a:srgbClr val="9FB2CC"/>
-                </a:solidFill>
-                <a:latin typeface="Calibri"/>
-                <a:ea typeface="Calibri"/>
-                <a:cs typeface="Calibri"/>
-                <a:sym typeface="Calibri"/>
-              </a:rPr>
-              <a:t>held-out splits</a:t>
-            </a:r>
-            <a:endParaRPr b="0" i="0" sz="1150" u="none" cap="none" strike="noStrike">
-              <a:solidFill>
-                <a:schemeClr val="dk1"/>
-              </a:solidFill>
-              <a:latin typeface="Calibri"/>
-              <a:ea typeface="Calibri"/>
-              <a:cs typeface="Calibri"/>
-              <a:sym typeface="Calibri"/>
-            </a:endParaRPr>
-          </a:p>
-        </p:txBody>
-      </p:sp>
-      <p:sp>
-        <p:nvSpPr>
-          <p:cNvPr id="681" name="Google Shape;681;p17"/>
-          <p:cNvSpPr/>
-          <p:nvPr/>
-        </p:nvSpPr>
-        <p:spPr>
-          <a:xfrm>
-            <a:off x="6278728" y="2788920"/>
-            <a:ext cx="2490140" cy="1325880"/>
-          </a:xfrm>
-          <a:prstGeom prst="roundRect">
-            <a:avLst>
-              <a:gd fmla="val 6897" name="adj"/>
-            </a:avLst>
-          </a:prstGeom>
-          <a:solidFill>
-            <a:srgbClr val="16233D"/>
-          </a:solidFill>
-          <a:ln>
-            <a:noFill/>
-          </a:ln>
-          <a:effectLst>
-            <a:outerShdw blurRad="114300" rotWithShape="0" algn="bl" dir="5400000" dist="38100">
-              <a:srgbClr val="000000">
-                <a:alpha val="27843"/>
-              </a:srgbClr>
-            </a:outerShdw>
-          </a:effectLst>
-        </p:spPr>
-        <p:txBody>
-          <a:bodyPr anchorCtr="0" anchor="ctr" bIns="91425" lIns="91425" spcFirstLastPara="1" rIns="91425" wrap="square" tIns="91425">
-            <a:noAutofit/>
-          </a:bodyPr>
-          <a:lstStyle/>
-          <a:p>
-            <a:pPr indent="0" lvl="0" marL="0" rtl="0" algn="l">
-              <a:spcBef>
-                <a:spcPts val="0"/>
-              </a:spcBef>
-              <a:spcAft>
-                <a:spcPts val="0"/>
-              </a:spcAft>
-              <a:buNone/>
-            </a:pPr>
-            <a:r>
-              <a:t/>
-            </a:r>
-            <a:endParaRPr/>
-          </a:p>
-        </p:txBody>
-      </p:sp>
-      <p:sp>
-        <p:nvSpPr>
-          <p:cNvPr id="682" name="Google Shape;682;p17"/>
-          <p:cNvSpPr/>
-          <p:nvPr/>
-        </p:nvSpPr>
-        <p:spPr>
-          <a:xfrm>
-            <a:off x="6278728" y="2926080"/>
-            <a:ext cx="2490140" cy="685800"/>
-          </a:xfrm>
-          <a:prstGeom prst="rect">
-            <a:avLst/>
-          </a:prstGeom>
-          <a:noFill/>
-          <a:ln>
-            <a:noFill/>
-          </a:ln>
-        </p:spPr>
-        <p:txBody>
-          <a:bodyPr anchorCtr="0" anchor="ctr" bIns="0" lIns="0" spcFirstLastPara="1" rIns="0" wrap="square" tIns="0">
-            <a:noAutofit/>
-          </a:bodyPr>
-          <a:lstStyle/>
-          <a:p>
-            <a:pPr indent="0" lvl="0" marL="0" marR="0" rtl="0" algn="ctr">
-              <a:spcBef>
-                <a:spcPts val="0"/>
-              </a:spcBef>
-              <a:spcAft>
-                <a:spcPts val="0"/>
-              </a:spcAft>
-              <a:buClr>
-                <a:srgbClr val="2DD4BF"/>
-              </a:buClr>
-              <a:buSzPts val="4400"/>
-              <a:buFont typeface="Century Schoolbook"/>
-              <a:buNone/>
-            </a:pPr>
-            <a:r>
-              <a:rPr b="1" i="0" lang="en-US" sz="4400" u="none" cap="none" strike="noStrike">
-                <a:solidFill>
-                  <a:srgbClr val="2DD4BF"/>
-                </a:solidFill>
-                <a:latin typeface="Century Schoolbook"/>
-                <a:ea typeface="Century Schoolbook"/>
-                <a:cs typeface="Century Schoolbook"/>
-                <a:sym typeface="Century Schoolbook"/>
-              </a:rPr>
-              <a:t>4 / 5</a:t>
-            </a:r>
-            <a:endParaRPr b="0" i="0" sz="4400" u="none" cap="none" strike="noStrike">
-              <a:solidFill>
-                <a:schemeClr val="dk1"/>
-              </a:solidFill>
-              <a:latin typeface="Calibri"/>
-              <a:ea typeface="Calibri"/>
-              <a:cs typeface="Calibri"/>
-              <a:sym typeface="Calibri"/>
-            </a:endParaRPr>
-          </a:p>
-        </p:txBody>
-      </p:sp>
-      <p:sp>
-        <p:nvSpPr>
-          <p:cNvPr id="683" name="Google Shape;683;p17"/>
-          <p:cNvSpPr/>
-          <p:nvPr/>
-        </p:nvSpPr>
-        <p:spPr>
-          <a:xfrm>
-            <a:off x="6415888" y="3685032"/>
-            <a:ext cx="2215820" cy="365760"/>
-          </a:xfrm>
-          <a:prstGeom prst="rect">
-            <a:avLst/>
-          </a:prstGeom>
-          <a:noFill/>
-          <a:ln>
-            <a:noFill/>
-          </a:ln>
-        </p:spPr>
-        <p:txBody>
-          <a:bodyPr anchorCtr="0" anchor="ctr" bIns="0" lIns="0" spcFirstLastPara="1" rIns="0" wrap="square" tIns="0">
-            <a:noAutofit/>
-          </a:bodyPr>
-          <a:lstStyle/>
-          <a:p>
-            <a:pPr indent="0" lvl="0" marL="0" marR="0" rtl="0" algn="ctr">
-              <a:lnSpc>
-                <a:spcPct val="113043"/>
-              </a:lnSpc>
-              <a:spcBef>
-                <a:spcPts val="0"/>
-              </a:spcBef>
-              <a:spcAft>
-                <a:spcPts val="0"/>
-              </a:spcAft>
-              <a:buClr>
-                <a:srgbClr val="9FB2CC"/>
-              </a:buClr>
-              <a:buSzPts val="1150"/>
-              <a:buFont typeface="Calibri"/>
-              <a:buNone/>
-            </a:pPr>
-            <a:r>
-              <a:rPr b="0" i="0" lang="en-US" sz="1150" u="none" cap="none" strike="noStrike">
-                <a:solidFill>
-                  <a:srgbClr val="9FB2CC"/>
-                </a:solidFill>
-                <a:latin typeface="Calibri"/>
-                <a:ea typeface="Calibri"/>
-                <a:cs typeface="Calibri"/>
-                <a:sym typeface="Calibri"/>
-              </a:rPr>
-              <a:t>real-time edge-ready</a:t>
-            </a:r>
-            <a:endParaRPr b="0" i="0" sz="1150" u="none" cap="none" strike="noStrike">
-              <a:solidFill>
-                <a:schemeClr val="dk1"/>
-              </a:solidFill>
-              <a:latin typeface="Calibri"/>
-              <a:ea typeface="Calibri"/>
-              <a:cs typeface="Calibri"/>
-              <a:sym typeface="Calibri"/>
-            </a:endParaRPr>
-          </a:p>
-        </p:txBody>
-      </p:sp>
-      <p:sp>
-        <p:nvSpPr>
-          <p:cNvPr id="684" name="Google Shape;684;p17"/>
-          <p:cNvSpPr/>
-          <p:nvPr/>
-        </p:nvSpPr>
-        <p:spPr>
-          <a:xfrm>
-            <a:off x="9134627" y="2788920"/>
-            <a:ext cx="2490140" cy="1325880"/>
-          </a:xfrm>
-          <a:prstGeom prst="roundRect">
-            <a:avLst>
-              <a:gd fmla="val 6897" name="adj"/>
-            </a:avLst>
-          </a:prstGeom>
-          <a:solidFill>
-            <a:srgbClr val="16233D"/>
-          </a:solidFill>
-          <a:ln>
-            <a:noFill/>
-          </a:ln>
-          <a:effectLst>
-            <a:outerShdw blurRad="114300" rotWithShape="0" algn="bl" dir="5400000" dist="38100">
-              <a:srgbClr val="000000">
-                <a:alpha val="27843"/>
-              </a:srgbClr>
-            </a:outerShdw>
-          </a:effectLst>
-        </p:spPr>
-        <p:txBody>
-          <a:bodyPr anchorCtr="0" anchor="ctr" bIns="91425" lIns="91425" spcFirstLastPara="1" rIns="91425" wrap="square" tIns="91425">
-            <a:noAutofit/>
-          </a:bodyPr>
-          <a:lstStyle/>
-          <a:p>
-            <a:pPr indent="0" lvl="0" marL="0" rtl="0" algn="l">
-              <a:spcBef>
-                <a:spcPts val="0"/>
-              </a:spcBef>
-              <a:spcAft>
-                <a:spcPts val="0"/>
-              </a:spcAft>
-              <a:buNone/>
-            </a:pPr>
-            <a:r>
-              <a:t/>
-            </a:r>
-            <a:endParaRPr/>
-          </a:p>
-        </p:txBody>
-      </p:sp>
-      <p:sp>
-        <p:nvSpPr>
-          <p:cNvPr id="685" name="Google Shape;685;p17"/>
-          <p:cNvSpPr/>
-          <p:nvPr/>
-        </p:nvSpPr>
-        <p:spPr>
-          <a:xfrm>
-            <a:off x="9134627" y="2926080"/>
-            <a:ext cx="2490140" cy="685800"/>
-          </a:xfrm>
-          <a:prstGeom prst="rect">
-            <a:avLst/>
-          </a:prstGeom>
-          <a:noFill/>
-          <a:ln>
-            <a:noFill/>
-          </a:ln>
-        </p:spPr>
-        <p:txBody>
-          <a:bodyPr anchorCtr="0" anchor="ctr" bIns="0" lIns="0" spcFirstLastPara="1" rIns="0" wrap="square" tIns="0">
-            <a:noAutofit/>
-          </a:bodyPr>
-          <a:lstStyle/>
-          <a:p>
-            <a:pPr indent="0" lvl="0" marL="0" marR="0" rtl="0" algn="ctr">
-              <a:spcBef>
-                <a:spcPts val="0"/>
-              </a:spcBef>
-              <a:spcAft>
-                <a:spcPts val="0"/>
-              </a:spcAft>
-              <a:buClr>
-                <a:srgbClr val="2DD4BF"/>
-              </a:buClr>
-              <a:buSzPts val="4400"/>
-              <a:buFont typeface="Century Schoolbook"/>
-              <a:buNone/>
-            </a:pPr>
-            <a:r>
-              <a:rPr b="1" i="0" lang="en-US" sz="4400" u="none" cap="none" strike="noStrike">
-                <a:solidFill>
-                  <a:srgbClr val="2DD4BF"/>
-                </a:solidFill>
-                <a:latin typeface="Century Schoolbook"/>
-                <a:ea typeface="Century Schoolbook"/>
-                <a:cs typeface="Century Schoolbook"/>
-                <a:sym typeface="Century Schoolbook"/>
-              </a:rPr>
-              <a:t>1</a:t>
-            </a:r>
-            <a:endParaRPr b="0" i="0" sz="4400" u="none" cap="none" strike="noStrike">
-              <a:solidFill>
-                <a:schemeClr val="dk1"/>
-              </a:solidFill>
-              <a:latin typeface="Calibri"/>
-              <a:ea typeface="Calibri"/>
-              <a:cs typeface="Calibri"/>
-              <a:sym typeface="Calibri"/>
-            </a:endParaRPr>
-          </a:p>
-        </p:txBody>
-      </p:sp>
-      <p:sp>
-        <p:nvSpPr>
-          <p:cNvPr id="686" name="Google Shape;686;p17"/>
-          <p:cNvSpPr/>
-          <p:nvPr/>
-        </p:nvSpPr>
-        <p:spPr>
-          <a:xfrm>
-            <a:off x="9271787" y="3685032"/>
-            <a:ext cx="2215820" cy="365760"/>
-          </a:xfrm>
-          <a:prstGeom prst="rect">
-            <a:avLst/>
-          </a:prstGeom>
-          <a:noFill/>
-          <a:ln>
-            <a:noFill/>
-          </a:ln>
-        </p:spPr>
-        <p:txBody>
-          <a:bodyPr anchorCtr="0" anchor="ctr" bIns="0" lIns="0" spcFirstLastPara="1" rIns="0" wrap="square" tIns="0">
-            <a:noAutofit/>
-          </a:bodyPr>
-          <a:lstStyle/>
-          <a:p>
-            <a:pPr indent="0" lvl="0" marL="0" marR="0" rtl="0" algn="ctr">
-              <a:lnSpc>
-                <a:spcPct val="113043"/>
-              </a:lnSpc>
-              <a:spcBef>
-                <a:spcPts val="0"/>
-              </a:spcBef>
-              <a:spcAft>
-                <a:spcPts val="0"/>
-              </a:spcAft>
-              <a:buClr>
-                <a:srgbClr val="9FB2CC"/>
-              </a:buClr>
-              <a:buSzPts val="1150"/>
-              <a:buFont typeface="Calibri"/>
-              <a:buNone/>
-            </a:pPr>
-            <a:r>
-              <a:rPr b="0" i="0" lang="en-US" sz="1150" u="none" cap="none" strike="noStrike">
-                <a:solidFill>
-                  <a:srgbClr val="9FB2CC"/>
-                </a:solidFill>
-                <a:latin typeface="Calibri"/>
-                <a:ea typeface="Calibri"/>
-                <a:cs typeface="Calibri"/>
-                <a:sym typeface="Calibri"/>
-              </a:rPr>
-              <a:t>module needs re-work</a:t>
-            </a:r>
-            <a:endParaRPr b="0" i="0" sz="1150" u="none" cap="none" strike="noStrike">
-              <a:solidFill>
-                <a:schemeClr val="dk1"/>
-              </a:solidFill>
-              <a:latin typeface="Calibri"/>
-              <a:ea typeface="Calibri"/>
-              <a:cs typeface="Calibri"/>
-              <a:sym typeface="Calibri"/>
-            </a:endParaRPr>
-          </a:p>
-        </p:txBody>
-      </p:sp>
-      <p:sp>
-        <p:nvSpPr>
-          <p:cNvPr id="687" name="Google Shape;687;p17"/>
-          <p:cNvSpPr/>
-          <p:nvPr/>
-        </p:nvSpPr>
-        <p:spPr>
-          <a:xfrm>
-            <a:off x="566928" y="4343400"/>
-            <a:ext cx="5346040" cy="1600200"/>
-          </a:xfrm>
-          <a:prstGeom prst="roundRect">
-            <a:avLst>
-              <a:gd fmla="val 5714" name="adj"/>
-            </a:avLst>
-          </a:prstGeom>
-          <a:solidFill>
-            <a:srgbClr val="16233D"/>
-          </a:solidFill>
-          <a:ln>
-            <a:noFill/>
-          </a:ln>
-          <a:effectLst>
-            <a:outerShdw blurRad="114300" rotWithShape="0" algn="bl" dir="5400000" dist="38100">
-              <a:srgbClr val="000000">
-                <a:alpha val="27843"/>
-              </a:srgbClr>
-            </a:outerShdw>
-          </a:effectLst>
-        </p:spPr>
-        <p:txBody>
-          <a:bodyPr anchorCtr="0" anchor="ctr" bIns="91425" lIns="91425" spcFirstLastPara="1" rIns="91425" wrap="square" tIns="91425">
-            <a:noAutofit/>
-          </a:bodyPr>
-          <a:lstStyle/>
-          <a:p>
-            <a:pPr indent="0" lvl="0" marL="0" rtl="0" algn="l">
-              <a:spcBef>
-                <a:spcPts val="0"/>
-              </a:spcBef>
-              <a:spcAft>
-                <a:spcPts val="0"/>
-              </a:spcAft>
-              <a:buNone/>
-            </a:pPr>
-            <a:r>
-              <a:t/>
-            </a:r>
-            <a:endParaRPr/>
-          </a:p>
-        </p:txBody>
-      </p:sp>
-      <p:sp>
-        <p:nvSpPr>
-          <p:cNvPr id="688" name="Google Shape;688;p17"/>
-          <p:cNvSpPr/>
-          <p:nvPr/>
-        </p:nvSpPr>
-        <p:spPr>
-          <a:xfrm>
-            <a:off x="859536" y="4581144"/>
-            <a:ext cx="4797400" cy="256032"/>
-          </a:xfrm>
-          <a:prstGeom prst="rect">
-            <a:avLst/>
-          </a:prstGeom>
-          <a:noFill/>
-          <a:ln>
-            <a:noFill/>
-          </a:ln>
-        </p:spPr>
-        <p:txBody>
-          <a:bodyPr anchorCtr="0" anchor="ctr" bIns="0" lIns="0" spcFirstLastPara="1" rIns="0" wrap="square" tIns="0">
-            <a:noAutofit/>
-          </a:bodyPr>
-          <a:lstStyle/>
-          <a:p>
-            <a:pPr indent="0" lvl="0" marL="0" marR="0" rtl="0" algn="l">
-              <a:spcBef>
-                <a:spcPts val="0"/>
-              </a:spcBef>
-              <a:spcAft>
-                <a:spcPts val="0"/>
-              </a:spcAft>
-              <a:buClr>
-                <a:srgbClr val="2DD4BF"/>
-              </a:buClr>
-              <a:buSzPts val="1100"/>
-              <a:buFont typeface="Calibri"/>
-              <a:buNone/>
-            </a:pPr>
-            <a:r>
-              <a:rPr b="1" i="0" lang="en-US" sz="1100" u="none" cap="none" strike="noStrike">
-                <a:solidFill>
-                  <a:srgbClr val="2DD4BF"/>
-                </a:solidFill>
-                <a:latin typeface="Calibri"/>
-                <a:ea typeface="Calibri"/>
-                <a:cs typeface="Calibri"/>
-                <a:sym typeface="Calibri"/>
-              </a:rPr>
-              <a:t>KEY FINDINGS</a:t>
-            </a:r>
-            <a:endParaRPr b="0" i="0" sz="1100" u="none" cap="none" strike="noStrike">
-              <a:solidFill>
-                <a:schemeClr val="dk1"/>
-              </a:solidFill>
-              <a:latin typeface="Calibri"/>
-              <a:ea typeface="Calibri"/>
-              <a:cs typeface="Calibri"/>
-              <a:sym typeface="Calibri"/>
-            </a:endParaRPr>
-          </a:p>
-        </p:txBody>
-      </p:sp>
-      <p:sp>
-        <p:nvSpPr>
-          <p:cNvPr id="689" name="Google Shape;689;p17"/>
-          <p:cNvSpPr/>
-          <p:nvPr/>
-        </p:nvSpPr>
-        <p:spPr>
-          <a:xfrm>
-            <a:off x="859536" y="4910328"/>
-            <a:ext cx="4797400" cy="868680"/>
-          </a:xfrm>
-          <a:prstGeom prst="rect">
-            <a:avLst/>
-          </a:prstGeom>
-          <a:noFill/>
-          <a:ln>
-            <a:noFill/>
-          </a:ln>
-        </p:spPr>
-        <p:txBody>
-          <a:bodyPr anchorCtr="0" anchor="ctr" bIns="0" lIns="0" spcFirstLastPara="1" rIns="0" wrap="square" tIns="0">
-            <a:noAutofit/>
-          </a:bodyPr>
-          <a:lstStyle/>
-          <a:p>
-            <a:pPr indent="-177800" lvl="0" marL="177800" marR="0" rtl="0" algn="l">
-              <a:lnSpc>
-                <a:spcPct val="121739"/>
-              </a:lnSpc>
-              <a:spcBef>
-                <a:spcPts val="0"/>
-              </a:spcBef>
-              <a:spcAft>
-                <a:spcPts val="0"/>
-              </a:spcAft>
-              <a:buClr>
-                <a:srgbClr val="9FB2CC"/>
-              </a:buClr>
-              <a:buSzPts val="1150"/>
-              <a:buFont typeface="Calibri"/>
-              <a:buChar char="•"/>
-            </a:pPr>
-            <a:r>
-              <a:rPr b="0" i="0" lang="en-US" sz="1150" u="none" cap="none" strike="noStrike">
-                <a:solidFill>
-                  <a:srgbClr val="9FB2CC"/>
-                </a:solidFill>
-                <a:latin typeface="Calibri"/>
-                <a:ea typeface="Calibri"/>
-                <a:cs typeface="Calibri"/>
-                <a:sym typeface="Calibri"/>
-              </a:rPr>
-              <a:t>Held-out scores confirm genuine generalisation — val ≈ test where measured.</a:t>
-            </a:r>
-            <a:endParaRPr b="0" i="0" sz="1150" u="none" cap="none" strike="noStrike">
-              <a:solidFill>
-                <a:schemeClr val="dk1"/>
-              </a:solidFill>
-              <a:latin typeface="Calibri"/>
-              <a:ea typeface="Calibri"/>
-              <a:cs typeface="Calibri"/>
-              <a:sym typeface="Calibri"/>
-            </a:endParaRPr>
-          </a:p>
-          <a:p>
-            <a:pPr indent="-177800" lvl="0" marL="177800" marR="0" rtl="0" algn="l">
-              <a:lnSpc>
-                <a:spcPct val="121739"/>
-              </a:lnSpc>
-              <a:spcBef>
-                <a:spcPts val="600"/>
-              </a:spcBef>
-              <a:spcAft>
-                <a:spcPts val="0"/>
-              </a:spcAft>
-              <a:buClr>
-                <a:srgbClr val="9FB2CC"/>
-              </a:buClr>
-              <a:buSzPts val="1150"/>
-              <a:buFont typeface="Calibri"/>
-              <a:buChar char="•"/>
-            </a:pPr>
-            <a:r>
-              <a:rPr b="0" i="0" lang="en-US" sz="1150" u="none" cap="none" strike="noStrike">
-                <a:solidFill>
-                  <a:srgbClr val="9FB2CC"/>
-                </a:solidFill>
-                <a:latin typeface="Calibri"/>
-                <a:ea typeface="Calibri"/>
-                <a:cs typeface="Calibri"/>
-                <a:sym typeface="Calibri"/>
-              </a:rPr>
-              <a:t>Errors are diagnosed, not hidden: class collapse, label noise, small-object recall.</a:t>
-            </a:r>
-            <a:endParaRPr b="0" i="0" sz="1150" u="none" cap="none" strike="noStrike">
-              <a:solidFill>
-                <a:schemeClr val="dk1"/>
-              </a:solidFill>
-              <a:latin typeface="Calibri"/>
-              <a:ea typeface="Calibri"/>
-              <a:cs typeface="Calibri"/>
-              <a:sym typeface="Calibri"/>
-            </a:endParaRPr>
-          </a:p>
-          <a:p>
-            <a:pPr indent="-177800" lvl="0" marL="177800" marR="0" rtl="0" algn="l">
-              <a:lnSpc>
-                <a:spcPct val="121739"/>
-              </a:lnSpc>
-              <a:spcBef>
-                <a:spcPts val="600"/>
-              </a:spcBef>
-              <a:spcAft>
-                <a:spcPts val="0"/>
-              </a:spcAft>
-              <a:buClr>
-                <a:srgbClr val="9FB2CC"/>
-              </a:buClr>
-              <a:buSzPts val="1150"/>
-              <a:buFont typeface="Calibri"/>
-              <a:buChar char="•"/>
-            </a:pPr>
-            <a:r>
-              <a:rPr b="0" i="0" lang="en-US" sz="1150" u="none" cap="none" strike="noStrike">
-                <a:solidFill>
-                  <a:srgbClr val="9FB2CC"/>
-                </a:solidFill>
-                <a:latin typeface="Calibri"/>
-                <a:ea typeface="Calibri"/>
-                <a:cs typeface="Calibri"/>
-                <a:sym typeface="Calibri"/>
-              </a:rPr>
-              <a:t>Failures lean to the safe direction — missed or low-confidence, not confident-wrong.</a:t>
-            </a:r>
-            <a:endParaRPr b="0" i="0" sz="1150" u="none" cap="none" strike="noStrike">
-              <a:solidFill>
-                <a:schemeClr val="dk1"/>
-              </a:solidFill>
-              <a:latin typeface="Calibri"/>
-              <a:ea typeface="Calibri"/>
-              <a:cs typeface="Calibri"/>
-              <a:sym typeface="Calibri"/>
-            </a:endParaRPr>
-          </a:p>
-        </p:txBody>
-      </p:sp>
-      <p:sp>
-        <p:nvSpPr>
-          <p:cNvPr id="690" name="Google Shape;690;p17"/>
-          <p:cNvSpPr/>
-          <p:nvPr/>
-        </p:nvSpPr>
-        <p:spPr>
-          <a:xfrm>
-            <a:off x="6278728" y="4343400"/>
-            <a:ext cx="5346040" cy="1600200"/>
-          </a:xfrm>
-          <a:prstGeom prst="roundRect">
-            <a:avLst>
-              <a:gd fmla="val 5714" name="adj"/>
-            </a:avLst>
-          </a:prstGeom>
-          <a:solidFill>
-            <a:srgbClr val="16233D"/>
-          </a:solidFill>
-          <a:ln>
-            <a:noFill/>
-          </a:ln>
-          <a:effectLst>
-            <a:outerShdw blurRad="114300" rotWithShape="0" algn="bl" dir="5400000" dist="38100">
-              <a:srgbClr val="000000">
-                <a:alpha val="27843"/>
-              </a:srgbClr>
-            </a:outerShdw>
-          </a:effectLst>
-        </p:spPr>
-        <p:txBody>
-          <a:bodyPr anchorCtr="0" anchor="ctr" bIns="91425" lIns="91425" spcFirstLastPara="1" rIns="91425" wrap="square" tIns="91425">
-            <a:noAutofit/>
-          </a:bodyPr>
-          <a:lstStyle/>
-          <a:p>
-            <a:pPr indent="0" lvl="0" marL="0" rtl="0" algn="l">
-              <a:spcBef>
-                <a:spcPts val="0"/>
-              </a:spcBef>
-              <a:spcAft>
-                <a:spcPts val="0"/>
-              </a:spcAft>
-              <a:buNone/>
-            </a:pPr>
-            <a:r>
-              <a:t/>
-            </a:r>
-            <a:endParaRPr/>
-          </a:p>
-        </p:txBody>
-      </p:sp>
-      <p:sp>
-        <p:nvSpPr>
-          <p:cNvPr id="691" name="Google Shape;691;p17"/>
-          <p:cNvSpPr/>
-          <p:nvPr/>
-        </p:nvSpPr>
-        <p:spPr>
-          <a:xfrm>
-            <a:off x="6571336" y="4581144"/>
-            <a:ext cx="4797400" cy="256032"/>
-          </a:xfrm>
-          <a:prstGeom prst="rect">
-            <a:avLst/>
-          </a:prstGeom>
-          <a:noFill/>
-          <a:ln>
-            <a:noFill/>
-          </a:ln>
-        </p:spPr>
-        <p:txBody>
-          <a:bodyPr anchorCtr="0" anchor="ctr" bIns="0" lIns="0" spcFirstLastPara="1" rIns="0" wrap="square" tIns="0">
-            <a:noAutofit/>
-          </a:bodyPr>
-          <a:lstStyle/>
-          <a:p>
-            <a:pPr indent="0" lvl="0" marL="0" marR="0" rtl="0" algn="l">
-              <a:spcBef>
-                <a:spcPts val="0"/>
-              </a:spcBef>
-              <a:spcAft>
-                <a:spcPts val="0"/>
-              </a:spcAft>
-              <a:buClr>
-                <a:srgbClr val="2DD4BF"/>
-              </a:buClr>
-              <a:buSzPts val="1100"/>
-              <a:buFont typeface="Calibri"/>
-              <a:buNone/>
-            </a:pPr>
-            <a:r>
-              <a:rPr b="1" i="0" lang="en-US" sz="1100" u="none" cap="none" strike="noStrike">
-                <a:solidFill>
-                  <a:srgbClr val="2DD4BF"/>
-                </a:solidFill>
-                <a:latin typeface="Calibri"/>
-                <a:ea typeface="Calibri"/>
-                <a:cs typeface="Calibri"/>
-                <a:sym typeface="Calibri"/>
-              </a:rPr>
-              <a:t>FUTURE WORK</a:t>
-            </a:r>
-            <a:endParaRPr b="0" i="0" sz="1100" u="none" cap="none" strike="noStrike">
-              <a:solidFill>
-                <a:schemeClr val="dk1"/>
-              </a:solidFill>
-              <a:latin typeface="Calibri"/>
-              <a:ea typeface="Calibri"/>
-              <a:cs typeface="Calibri"/>
-              <a:sym typeface="Calibri"/>
-            </a:endParaRPr>
-          </a:p>
-        </p:txBody>
-      </p:sp>
-      <p:sp>
-        <p:nvSpPr>
-          <p:cNvPr id="692" name="Google Shape;692;p17"/>
-          <p:cNvSpPr/>
-          <p:nvPr/>
-        </p:nvSpPr>
-        <p:spPr>
-          <a:xfrm>
-            <a:off x="6571336" y="4910328"/>
-            <a:ext cx="4797400" cy="868680"/>
-          </a:xfrm>
-          <a:prstGeom prst="rect">
-            <a:avLst/>
-          </a:prstGeom>
-          <a:noFill/>
-          <a:ln>
-            <a:noFill/>
-          </a:ln>
-        </p:spPr>
-        <p:txBody>
-          <a:bodyPr anchorCtr="0" anchor="ctr" bIns="0" lIns="0" spcFirstLastPara="1" rIns="0" wrap="square" tIns="0">
-            <a:noAutofit/>
-          </a:bodyPr>
-          <a:lstStyle/>
-          <a:p>
-            <a:pPr indent="-177800" lvl="0" marL="177800" marR="0" rtl="0" algn="l">
-              <a:lnSpc>
-                <a:spcPct val="121739"/>
-              </a:lnSpc>
-              <a:spcBef>
-                <a:spcPts val="0"/>
-              </a:spcBef>
-              <a:spcAft>
-                <a:spcPts val="0"/>
-              </a:spcAft>
-              <a:buClr>
-                <a:srgbClr val="9FB2CC"/>
-              </a:buClr>
-              <a:buSzPts val="1150"/>
-              <a:buFont typeface="Calibri"/>
-              <a:buChar char="•"/>
-            </a:pPr>
-            <a:r>
-              <a:rPr b="0" i="0" lang="en-US" sz="1150" u="none" cap="none" strike="noStrike">
-                <a:solidFill>
-                  <a:srgbClr val="9FB2CC"/>
-                </a:solidFill>
-                <a:latin typeface="Calibri"/>
-                <a:ea typeface="Calibri"/>
-                <a:cs typeface="Calibri"/>
-                <a:sym typeface="Calibri"/>
-              </a:rPr>
-              <a:t>Close drinking recall and fatigue class collapse with better labels &amp; temporal context.</a:t>
-            </a:r>
-            <a:endParaRPr b="0" i="0" sz="1150" u="none" cap="none" strike="noStrike">
-              <a:solidFill>
-                <a:schemeClr val="dk1"/>
-              </a:solidFill>
-              <a:latin typeface="Calibri"/>
-              <a:ea typeface="Calibri"/>
-              <a:cs typeface="Calibri"/>
-              <a:sym typeface="Calibri"/>
-            </a:endParaRPr>
-          </a:p>
-          <a:p>
-            <a:pPr indent="-177800" lvl="0" marL="177800" marR="0" rtl="0" algn="l">
-              <a:lnSpc>
-                <a:spcPct val="121739"/>
-              </a:lnSpc>
-              <a:spcBef>
-                <a:spcPts val="600"/>
-              </a:spcBef>
-              <a:spcAft>
-                <a:spcPts val="0"/>
-              </a:spcAft>
-              <a:buClr>
-                <a:srgbClr val="9FB2CC"/>
-              </a:buClr>
-              <a:buSzPts val="1150"/>
-              <a:buFont typeface="Calibri"/>
-              <a:buChar char="•"/>
-            </a:pPr>
-            <a:r>
-              <a:rPr b="0" i="0" lang="en-US" sz="1150" u="none" cap="none" strike="noStrike">
-                <a:solidFill>
-                  <a:srgbClr val="9FB2CC"/>
-                </a:solidFill>
-                <a:latin typeface="Calibri"/>
-                <a:ea typeface="Calibri"/>
-                <a:cs typeface="Calibri"/>
-                <a:sym typeface="Calibri"/>
-              </a:rPr>
-              <a:t>Add temporal smoothing and class-specific thresholds across the detectors.</a:t>
-            </a:r>
-            <a:endParaRPr b="0" i="0" sz="1150" u="none" cap="none" strike="noStrike">
-              <a:solidFill>
-                <a:schemeClr val="dk1"/>
-              </a:solidFill>
-              <a:latin typeface="Calibri"/>
-              <a:ea typeface="Calibri"/>
-              <a:cs typeface="Calibri"/>
-              <a:sym typeface="Calibri"/>
-            </a:endParaRPr>
-          </a:p>
-          <a:p>
-            <a:pPr indent="-177800" lvl="0" marL="177800" marR="0" rtl="0" algn="l">
-              <a:lnSpc>
-                <a:spcPct val="121739"/>
-              </a:lnSpc>
-              <a:spcBef>
-                <a:spcPts val="600"/>
-              </a:spcBef>
-              <a:spcAft>
-                <a:spcPts val="0"/>
-              </a:spcAft>
-              <a:buClr>
-                <a:srgbClr val="9FB2CC"/>
-              </a:buClr>
-              <a:buSzPts val="1150"/>
-              <a:buFont typeface="Calibri"/>
-              <a:buChar char="•"/>
-            </a:pPr>
-            <a:r>
-              <a:rPr b="0" i="0" lang="en-US" sz="1150" u="none" cap="none" strike="noStrike">
-                <a:solidFill>
-                  <a:srgbClr val="9FB2CC"/>
-                </a:solidFill>
-                <a:latin typeface="Calibri"/>
-                <a:ea typeface="Calibri"/>
-                <a:cs typeface="Calibri"/>
-                <a:sym typeface="Calibri"/>
-              </a:rPr>
-              <a:t>Wire all five into the Driver Risk Fusion Engine and a unified alert dashboard.</a:t>
-            </a:r>
-            <a:endParaRPr b="0" i="0" sz="1150" u="none" cap="none" strike="noStrike">
-              <a:solidFill>
-                <a:schemeClr val="dk1"/>
-              </a:solidFill>
-              <a:latin typeface="Calibri"/>
-              <a:ea typeface="Calibri"/>
-              <a:cs typeface="Calibri"/>
-              <a:sym typeface="Calibri"/>
-            </a:endParaRPr>
-          </a:p>
-        </p:txBody>
-      </p:sp>
-      <p:sp>
-        <p:nvSpPr>
-          <p:cNvPr id="693" name="Google Shape;693;p17"/>
-          <p:cNvSpPr/>
-          <p:nvPr/>
-        </p:nvSpPr>
-        <p:spPr>
-          <a:xfrm>
-            <a:off x="566928" y="6108192"/>
-            <a:ext cx="10972800" cy="274320"/>
-          </a:xfrm>
-          <a:prstGeom prst="rect">
-            <a:avLst/>
-          </a:prstGeom>
-          <a:noFill/>
-          <a:ln>
-            <a:noFill/>
-          </a:ln>
-        </p:spPr>
-        <p:txBody>
-          <a:bodyPr anchorCtr="0" anchor="ctr" bIns="0" lIns="0" spcFirstLastPara="1" rIns="0" wrap="square" tIns="0">
-            <a:noAutofit/>
-          </a:bodyPr>
-          <a:lstStyle/>
-          <a:p>
-            <a:pPr indent="0" lvl="0" marL="0" marR="0" rtl="0" algn="ctr">
-              <a:spcBef>
-                <a:spcPts val="0"/>
-              </a:spcBef>
-              <a:spcAft>
-                <a:spcPts val="0"/>
-              </a:spcAft>
-              <a:buClr>
-                <a:srgbClr val="2DD4BF"/>
-              </a:buClr>
-              <a:buSzPts val="1300"/>
-              <a:buFont typeface="Century Schoolbook"/>
-              <a:buNone/>
-            </a:pPr>
-            <a:r>
-              <a:rPr b="1" i="1" lang="en-US" sz="1300" u="none" cap="none" strike="noStrike">
-                <a:solidFill>
-                  <a:srgbClr val="2DD4BF"/>
-                </a:solidFill>
-                <a:latin typeface="Century Schoolbook"/>
-                <a:ea typeface="Century Schoolbook"/>
-                <a:cs typeface="Century Schoolbook"/>
-                <a:sym typeface="Century Schoolbook"/>
-              </a:rPr>
-              <a:t>From training to a rigorously evaluated, deployment-aware driver wellness system.</a:t>
-            </a:r>
-            <a:endParaRPr b="0" i="0" sz="1300" u="none" cap="none" strike="noStrike">
-              <a:solidFill>
-                <a:schemeClr val="dk1"/>
-              </a:solidFill>
-              <a:latin typeface="Calibri"/>
-              <a:ea typeface="Calibri"/>
-              <a:cs typeface="Calibri"/>
-              <a:sym typeface="Calibri"/>
-            </a:endParaRPr>
-          </a:p>
-        </p:txBody>
-      </p:sp>
-    </p:spTree>
-  </p:cSld>
-  <p:clrMapOvr>
-    <a:masterClrMapping/>
-  </p:clrMapOvr>
-</p:sld>
-</file>
-
 <file path=ppt/slides/slide2.xml><?xml version="1.0" encoding="utf-8"?>
 <p:sld xmlns:a="http://schemas.openxmlformats.org/drawingml/2006/main" xmlns:r="http://schemas.openxmlformats.org/officeDocument/2006/relationships" xmlns:mc="http://schemas.openxmlformats.org/markup-compatibility/2006" xmlns:mv="urn:schemas-microsoft-com:mac:vml" xmlns:p="http://schemas.openxmlformats.org/presentationml/2006/main" xmlns:c="http://schemas.openxmlformats.org/drawingml/2006/chart" xmlns:dgm="http://schemas.openxmlformats.org/drawingml/2006/diagram" xmlns:o="urn:schemas-microsoft-com:office:office" xmlns:v="urn:schemas-microsoft-com:vml" xmlns:pvml="urn:schemas-microsoft-com:office:powerpoint" xmlns:com="http://schemas.openxmlformats.org/drawingml/2006/compatibility" xmlns:p14="http://schemas.microsoft.com/office/powerpoint/2010/main" xmlns:p15="http://schemas.microsoft.com/office/powerpoint/2012/main" xmlns:ahyp="http://schemas.microsoft.com/office/drawing/2018/hyperlinkcolor">
   <p:cSld>
